--- a/AI-Powered-Crop-Stress-Detection-and-Farm-Early-Warning-Platform_Rethemed.pptx
+++ b/AI-Powered-Crop-Stress-Detection-and-Farm-Early-Warning-Platform_Rethemed.pptx
@@ -1,24 +1,25 @@
 
 <file path=ppt/presentation.xml><?xml version="1.0" encoding="utf-8"?>
-<p:presentation xmlns:a="http://schemas.openxmlformats.org/drawingml/2006/main" xmlns:r="http://schemas.openxmlformats.org/officeDocument/2006/relationships" xmlns:p="http://schemas.openxmlformats.org/presentationml/2006/main" saveSubsetFonts="1" autoCompressPictures="0">
+<p:presentation xmlns:a="http://schemas.openxmlformats.org/drawingml/2006/main" xmlns:r="http://schemas.openxmlformats.org/officeDocument/2006/relationships" xmlns:p="http://schemas.openxmlformats.org/presentationml/2006/main" autoCompressPictures="0">
   <p:sldMasterIdLst>
     <p:sldMasterId id="2147483648" r:id="rId1"/>
   </p:sldMasterIdLst>
   <p:sldIdLst>
-    <p:sldId id="256" r:id="rId7"/>
-    <p:sldId id="257" r:id="rId8"/>
-    <p:sldId id="258" r:id="rId9"/>
-    <p:sldId id="259" r:id="rId10"/>
-    <p:sldId id="260" r:id="rId11"/>
-    <p:sldId id="261" r:id="rId12"/>
-    <p:sldId id="262" r:id="rId13"/>
-    <p:sldId id="263" r:id="rId14"/>
-    <p:sldId id="264" r:id="rId15"/>
-    <p:sldId id="265" r:id="rId16"/>
-    <p:sldId id="266" r:id="rId17"/>
-    <p:sldId id="267" r:id="rId18"/>
+    <p:sldId id="256" r:id="rId3"/>
+    <p:sldId id="257" r:id="rId4"/>
+    <p:sldId id="258" r:id="rId5"/>
+    <p:sldId id="259" r:id="rId6"/>
+    <p:sldId id="260" r:id="rId7"/>
+    <p:sldId id="261" r:id="rId8"/>
+    <p:sldId id="262" r:id="rId9"/>
+    <p:sldId id="263" r:id="rId10"/>
+    <p:sldId id="264" r:id="rId11"/>
+    <p:sldId id="265" r:id="rId12"/>
+    <p:sldId id="266" r:id="rId13"/>
+    <p:sldId id="267" r:id="rId14"/>
+    <p:sldId id="268" r:id="rId15"/>
   </p:sldIdLst>
-  <p:sldSz cx="12188952" cy="6858000" type="screen4x3"/>
+  <p:sldSz cx="12188825" cy="6858000" type="screen4x3"/>
   <p:notesSz cx="6858000" cy="9144000"/>
   <p:defaultTextStyle>
     <a:defPPr>
@@ -115,6 +116,22 @@
       </a:defRPr>
     </a:lvl9pPr>
   </p:defaultTextStyle>
+  <p:extLst>
+    <p:ext uri="{EFAFB233-063F-42B5-8137-9DF3F51BA10A}">
+      <p15:sldGuideLst xmlns:p15="http://schemas.microsoft.com/office/powerpoint/2012/main">
+        <p15:guide id="1" orient="horz" pos="2160" userDrawn="1">
+          <p15:clr>
+            <a:srgbClr val="A4A3A4"/>
+          </p15:clr>
+        </p15:guide>
+        <p15:guide id="2" pos="2908" userDrawn="1">
+          <p15:clr>
+            <a:srgbClr val="A4A3A4"/>
+          </p15:clr>
+        </p15:guide>
+      </p15:sldGuideLst>
+    </p:ext>
+  </p:extLst>
 </p:presentation>
 </file>
 
@@ -299,7 +316,6 @@
           <a:p>
             <a:fld id="{5BCAD085-E8A6-8845-BD4E-CB4CCA059FC4}" type="datetimeFigureOut">
               <a:rPr lang="en-US" smtClean="0"/>
-              <a:t>1/27/13</a:t>
             </a:fld>
             <a:endParaRPr lang="en-US"/>
           </a:p>
@@ -341,18 +357,12 @@
           <a:p>
             <a:fld id="{C1FF6DA9-008F-8B48-92A6-B652298478BF}" type="slidenum">
               <a:rPr lang="en-US" smtClean="0"/>
-              <a:t>‹#›</a:t>
             </a:fld>
             <a:endParaRPr lang="en-US"/>
           </a:p>
         </p:txBody>
       </p:sp>
     </p:spTree>
-    <p:extLst>
-      <p:ext uri="{BB962C8B-B14F-4D97-AF65-F5344CB8AC3E}">
-        <p14:creationId xmlns:p14="http://schemas.microsoft.com/office/powerpoint/2010/main" val="3168075583"/>
-      </p:ext>
-    </p:extLst>
   </p:cSld>
   <p:clrMapOvr>
     <a:masterClrMapping/>
@@ -420,6 +430,7 @@
               <a:rPr lang="en-US" smtClean="0"/>
               <a:t>Click to edit Master text styles</a:t>
             </a:r>
+            <a:endParaRPr lang="en-US" smtClean="0"/>
           </a:p>
           <a:p>
             <a:pPr lvl="1"/>
@@ -427,6 +438,7 @@
               <a:rPr lang="en-US" smtClean="0"/>
               <a:t>Second level</a:t>
             </a:r>
+            <a:endParaRPr lang="en-US" smtClean="0"/>
           </a:p>
           <a:p>
             <a:pPr lvl="2"/>
@@ -434,6 +446,7 @@
               <a:rPr lang="en-US" smtClean="0"/>
               <a:t>Third level</a:t>
             </a:r>
+            <a:endParaRPr lang="en-US" smtClean="0"/>
           </a:p>
           <a:p>
             <a:pPr lvl="3"/>
@@ -441,6 +454,7 @@
               <a:rPr lang="en-US" smtClean="0"/>
               <a:t>Fourth level</a:t>
             </a:r>
+            <a:endParaRPr lang="en-US" smtClean="0"/>
           </a:p>
           <a:p>
             <a:pPr lvl="4"/>
@@ -469,7 +483,6 @@
           <a:p>
             <a:fld id="{5BCAD085-E8A6-8845-BD4E-CB4CCA059FC4}" type="datetimeFigureOut">
               <a:rPr lang="en-US" smtClean="0"/>
-              <a:t>1/27/13</a:t>
             </a:fld>
             <a:endParaRPr lang="en-US"/>
           </a:p>
@@ -511,18 +524,12 @@
           <a:p>
             <a:fld id="{C1FF6DA9-008F-8B48-92A6-B652298478BF}" type="slidenum">
               <a:rPr lang="en-US" smtClean="0"/>
-              <a:t>‹#›</a:t>
             </a:fld>
             <a:endParaRPr lang="en-US"/>
           </a:p>
         </p:txBody>
       </p:sp>
     </p:spTree>
-    <p:extLst>
-      <p:ext uri="{BB962C8B-B14F-4D97-AF65-F5344CB8AC3E}">
-        <p14:creationId xmlns:p14="http://schemas.microsoft.com/office/powerpoint/2010/main" val="2910927964"/>
-      </p:ext>
-    </p:extLst>
   </p:cSld>
   <p:clrMapOvr>
     <a:masterClrMapping/>
@@ -600,6 +607,7 @@
               <a:rPr lang="en-US" smtClean="0"/>
               <a:t>Click to edit Master text styles</a:t>
             </a:r>
+            <a:endParaRPr lang="en-US" smtClean="0"/>
           </a:p>
           <a:p>
             <a:pPr lvl="1"/>
@@ -607,6 +615,7 @@
               <a:rPr lang="en-US" smtClean="0"/>
               <a:t>Second level</a:t>
             </a:r>
+            <a:endParaRPr lang="en-US" smtClean="0"/>
           </a:p>
           <a:p>
             <a:pPr lvl="2"/>
@@ -614,6 +623,7 @@
               <a:rPr lang="en-US" smtClean="0"/>
               <a:t>Third level</a:t>
             </a:r>
+            <a:endParaRPr lang="en-US" smtClean="0"/>
           </a:p>
           <a:p>
             <a:pPr lvl="3"/>
@@ -621,6 +631,7 @@
               <a:rPr lang="en-US" smtClean="0"/>
               <a:t>Fourth level</a:t>
             </a:r>
+            <a:endParaRPr lang="en-US" smtClean="0"/>
           </a:p>
           <a:p>
             <a:pPr lvl="4"/>
@@ -649,7 +660,6 @@
           <a:p>
             <a:fld id="{5BCAD085-E8A6-8845-BD4E-CB4CCA059FC4}" type="datetimeFigureOut">
               <a:rPr lang="en-US" smtClean="0"/>
-              <a:t>1/27/13</a:t>
             </a:fld>
             <a:endParaRPr lang="en-US"/>
           </a:p>
@@ -691,18 +701,12 @@
           <a:p>
             <a:fld id="{C1FF6DA9-008F-8B48-92A6-B652298478BF}" type="slidenum">
               <a:rPr lang="en-US" smtClean="0"/>
-              <a:t>‹#›</a:t>
             </a:fld>
             <a:endParaRPr lang="en-US"/>
           </a:p>
         </p:txBody>
       </p:sp>
     </p:spTree>
-    <p:extLst>
-      <p:ext uri="{BB962C8B-B14F-4D97-AF65-F5344CB8AC3E}">
-        <p14:creationId xmlns:p14="http://schemas.microsoft.com/office/powerpoint/2010/main" val="3612223792"/>
-      </p:ext>
-    </p:extLst>
   </p:cSld>
   <p:clrMapOvr>
     <a:masterClrMapping/>
@@ -770,6 +774,7 @@
               <a:rPr lang="en-US" smtClean="0"/>
               <a:t>Click to edit Master text styles</a:t>
             </a:r>
+            <a:endParaRPr lang="en-US" smtClean="0"/>
           </a:p>
           <a:p>
             <a:pPr lvl="1"/>
@@ -777,6 +782,7 @@
               <a:rPr lang="en-US" smtClean="0"/>
               <a:t>Second level</a:t>
             </a:r>
+            <a:endParaRPr lang="en-US" smtClean="0"/>
           </a:p>
           <a:p>
             <a:pPr lvl="2"/>
@@ -784,6 +790,7 @@
               <a:rPr lang="en-US" smtClean="0"/>
               <a:t>Third level</a:t>
             </a:r>
+            <a:endParaRPr lang="en-US" smtClean="0"/>
           </a:p>
           <a:p>
             <a:pPr lvl="3"/>
@@ -791,6 +798,7 @@
               <a:rPr lang="en-US" smtClean="0"/>
               <a:t>Fourth level</a:t>
             </a:r>
+            <a:endParaRPr lang="en-US" smtClean="0"/>
           </a:p>
           <a:p>
             <a:pPr lvl="4"/>
@@ -819,7 +827,6 @@
           <a:p>
             <a:fld id="{5BCAD085-E8A6-8845-BD4E-CB4CCA059FC4}" type="datetimeFigureOut">
               <a:rPr lang="en-US" smtClean="0"/>
-              <a:t>1/27/13</a:t>
             </a:fld>
             <a:endParaRPr lang="en-US"/>
           </a:p>
@@ -861,18 +868,12 @@
           <a:p>
             <a:fld id="{C1FF6DA9-008F-8B48-92A6-B652298478BF}" type="slidenum">
               <a:rPr lang="en-US" smtClean="0"/>
-              <a:t>‹#›</a:t>
             </a:fld>
             <a:endParaRPr lang="en-US"/>
           </a:p>
         </p:txBody>
       </p:sp>
     </p:spTree>
-    <p:extLst>
-      <p:ext uri="{BB962C8B-B14F-4D97-AF65-F5344CB8AC3E}">
-        <p14:creationId xmlns:p14="http://schemas.microsoft.com/office/powerpoint/2010/main" val="2614314258"/>
-      </p:ext>
-    </p:extLst>
   </p:cSld>
   <p:clrMapOvr>
     <a:masterClrMapping/>
@@ -1045,6 +1046,7 @@
               <a:rPr lang="en-US" smtClean="0"/>
               <a:t>Click to edit Master text styles</a:t>
             </a:r>
+            <a:endParaRPr lang="en-US" smtClean="0"/>
           </a:p>
         </p:txBody>
       </p:sp>
@@ -1065,7 +1067,6 @@
           <a:p>
             <a:fld id="{5BCAD085-E8A6-8845-BD4E-CB4CCA059FC4}" type="datetimeFigureOut">
               <a:rPr lang="en-US" smtClean="0"/>
-              <a:t>1/27/13</a:t>
             </a:fld>
             <a:endParaRPr lang="en-US"/>
           </a:p>
@@ -1107,18 +1108,12 @@
           <a:p>
             <a:fld id="{C1FF6DA9-008F-8B48-92A6-B652298478BF}" type="slidenum">
               <a:rPr lang="en-US" smtClean="0"/>
-              <a:t>‹#›</a:t>
             </a:fld>
             <a:endParaRPr lang="en-US"/>
           </a:p>
         </p:txBody>
       </p:sp>
     </p:spTree>
-    <p:extLst>
-      <p:ext uri="{BB962C8B-B14F-4D97-AF65-F5344CB8AC3E}">
-        <p14:creationId xmlns:p14="http://schemas.microsoft.com/office/powerpoint/2010/main" val="960648375"/>
-      </p:ext>
-    </p:extLst>
   </p:cSld>
   <p:clrMapOvr>
     <a:masterClrMapping/>
@@ -1219,6 +1214,7 @@
               <a:rPr lang="en-US" smtClean="0"/>
               <a:t>Click to edit Master text styles</a:t>
             </a:r>
+            <a:endParaRPr lang="en-US" smtClean="0"/>
           </a:p>
           <a:p>
             <a:pPr lvl="1"/>
@@ -1226,6 +1222,7 @@
               <a:rPr lang="en-US" smtClean="0"/>
               <a:t>Second level</a:t>
             </a:r>
+            <a:endParaRPr lang="en-US" smtClean="0"/>
           </a:p>
           <a:p>
             <a:pPr lvl="2"/>
@@ -1233,6 +1230,7 @@
               <a:rPr lang="en-US" smtClean="0"/>
               <a:t>Third level</a:t>
             </a:r>
+            <a:endParaRPr lang="en-US" smtClean="0"/>
           </a:p>
           <a:p>
             <a:pPr lvl="3"/>
@@ -1240,6 +1238,7 @@
               <a:rPr lang="en-US" smtClean="0"/>
               <a:t>Fourth level</a:t>
             </a:r>
+            <a:endParaRPr lang="en-US" smtClean="0"/>
           </a:p>
           <a:p>
             <a:pPr lvl="4"/>
@@ -1304,6 +1303,7 @@
               <a:rPr lang="en-US" smtClean="0"/>
               <a:t>Click to edit Master text styles</a:t>
             </a:r>
+            <a:endParaRPr lang="en-US" smtClean="0"/>
           </a:p>
           <a:p>
             <a:pPr lvl="1"/>
@@ -1311,6 +1311,7 @@
               <a:rPr lang="en-US" smtClean="0"/>
               <a:t>Second level</a:t>
             </a:r>
+            <a:endParaRPr lang="en-US" smtClean="0"/>
           </a:p>
           <a:p>
             <a:pPr lvl="2"/>
@@ -1318,6 +1319,7 @@
               <a:rPr lang="en-US" smtClean="0"/>
               <a:t>Third level</a:t>
             </a:r>
+            <a:endParaRPr lang="en-US" smtClean="0"/>
           </a:p>
           <a:p>
             <a:pPr lvl="3"/>
@@ -1325,6 +1327,7 @@
               <a:rPr lang="en-US" smtClean="0"/>
               <a:t>Fourth level</a:t>
             </a:r>
+            <a:endParaRPr lang="en-US" smtClean="0"/>
           </a:p>
           <a:p>
             <a:pPr lvl="4"/>
@@ -1353,7 +1356,6 @@
           <a:p>
             <a:fld id="{5BCAD085-E8A6-8845-BD4E-CB4CCA059FC4}" type="datetimeFigureOut">
               <a:rPr lang="en-US" smtClean="0"/>
-              <a:t>1/27/13</a:t>
             </a:fld>
             <a:endParaRPr lang="en-US"/>
           </a:p>
@@ -1395,18 +1397,12 @@
           <a:p>
             <a:fld id="{C1FF6DA9-008F-8B48-92A6-B652298478BF}" type="slidenum">
               <a:rPr lang="en-US" smtClean="0"/>
-              <a:t>‹#›</a:t>
             </a:fld>
             <a:endParaRPr lang="en-US"/>
           </a:p>
         </p:txBody>
       </p:sp>
     </p:spTree>
-    <p:extLst>
-      <p:ext uri="{BB962C8B-B14F-4D97-AF65-F5344CB8AC3E}">
-        <p14:creationId xmlns:p14="http://schemas.microsoft.com/office/powerpoint/2010/main" val="2782244947"/>
-      </p:ext>
-    </p:extLst>
   </p:cSld>
   <p:clrMapOvr>
     <a:masterClrMapping/>
@@ -1520,6 +1516,7 @@
               <a:rPr lang="en-US" smtClean="0"/>
               <a:t>Click to edit Master text styles</a:t>
             </a:r>
+            <a:endParaRPr lang="en-US" smtClean="0"/>
           </a:p>
         </p:txBody>
       </p:sp>
@@ -1576,6 +1573,7 @@
               <a:rPr lang="en-US" smtClean="0"/>
               <a:t>Click to edit Master text styles</a:t>
             </a:r>
+            <a:endParaRPr lang="en-US" smtClean="0"/>
           </a:p>
           <a:p>
             <a:pPr lvl="1"/>
@@ -1583,6 +1581,7 @@
               <a:rPr lang="en-US" smtClean="0"/>
               <a:t>Second level</a:t>
             </a:r>
+            <a:endParaRPr lang="en-US" smtClean="0"/>
           </a:p>
           <a:p>
             <a:pPr lvl="2"/>
@@ -1590,6 +1589,7 @@
               <a:rPr lang="en-US" smtClean="0"/>
               <a:t>Third level</a:t>
             </a:r>
+            <a:endParaRPr lang="en-US" smtClean="0"/>
           </a:p>
           <a:p>
             <a:pPr lvl="3"/>
@@ -1597,6 +1597,7 @@
               <a:rPr lang="en-US" smtClean="0"/>
               <a:t>Fourth level</a:t>
             </a:r>
+            <a:endParaRPr lang="en-US" smtClean="0"/>
           </a:p>
           <a:p>
             <a:pPr lvl="4"/>
@@ -1670,6 +1671,7 @@
               <a:rPr lang="en-US" smtClean="0"/>
               <a:t>Click to edit Master text styles</a:t>
             </a:r>
+            <a:endParaRPr lang="en-US" smtClean="0"/>
           </a:p>
         </p:txBody>
       </p:sp>
@@ -1726,6 +1728,7 @@
               <a:rPr lang="en-US" smtClean="0"/>
               <a:t>Click to edit Master text styles</a:t>
             </a:r>
+            <a:endParaRPr lang="en-US" smtClean="0"/>
           </a:p>
           <a:p>
             <a:pPr lvl="1"/>
@@ -1733,6 +1736,7 @@
               <a:rPr lang="en-US" smtClean="0"/>
               <a:t>Second level</a:t>
             </a:r>
+            <a:endParaRPr lang="en-US" smtClean="0"/>
           </a:p>
           <a:p>
             <a:pPr lvl="2"/>
@@ -1740,6 +1744,7 @@
               <a:rPr lang="en-US" smtClean="0"/>
               <a:t>Third level</a:t>
             </a:r>
+            <a:endParaRPr lang="en-US" smtClean="0"/>
           </a:p>
           <a:p>
             <a:pPr lvl="3"/>
@@ -1747,6 +1752,7 @@
               <a:rPr lang="en-US" smtClean="0"/>
               <a:t>Fourth level</a:t>
             </a:r>
+            <a:endParaRPr lang="en-US" smtClean="0"/>
           </a:p>
           <a:p>
             <a:pPr lvl="4"/>
@@ -1775,7 +1781,6 @@
           <a:p>
             <a:fld id="{5BCAD085-E8A6-8845-BD4E-CB4CCA059FC4}" type="datetimeFigureOut">
               <a:rPr lang="en-US" smtClean="0"/>
-              <a:t>1/27/13</a:t>
             </a:fld>
             <a:endParaRPr lang="en-US"/>
           </a:p>
@@ -1817,18 +1822,12 @@
           <a:p>
             <a:fld id="{C1FF6DA9-008F-8B48-92A6-B652298478BF}" type="slidenum">
               <a:rPr lang="en-US" smtClean="0"/>
-              <a:t>‹#›</a:t>
             </a:fld>
             <a:endParaRPr lang="en-US"/>
           </a:p>
         </p:txBody>
       </p:sp>
     </p:spTree>
-    <p:extLst>
-      <p:ext uri="{BB962C8B-B14F-4D97-AF65-F5344CB8AC3E}">
-        <p14:creationId xmlns:p14="http://schemas.microsoft.com/office/powerpoint/2010/main" val="990158736"/>
-      </p:ext>
-    </p:extLst>
   </p:cSld>
   <p:clrMapOvr>
     <a:masterClrMapping/>
@@ -1893,7 +1892,6 @@
           <a:p>
             <a:fld id="{5BCAD085-E8A6-8845-BD4E-CB4CCA059FC4}" type="datetimeFigureOut">
               <a:rPr lang="en-US" smtClean="0"/>
-              <a:t>1/27/13</a:t>
             </a:fld>
             <a:endParaRPr lang="en-US"/>
           </a:p>
@@ -1935,18 +1933,12 @@
           <a:p>
             <a:fld id="{C1FF6DA9-008F-8B48-92A6-B652298478BF}" type="slidenum">
               <a:rPr lang="en-US" smtClean="0"/>
-              <a:t>‹#›</a:t>
             </a:fld>
             <a:endParaRPr lang="en-US"/>
           </a:p>
         </p:txBody>
       </p:sp>
     </p:spTree>
-    <p:extLst>
-      <p:ext uri="{BB962C8B-B14F-4D97-AF65-F5344CB8AC3E}">
-        <p14:creationId xmlns:p14="http://schemas.microsoft.com/office/powerpoint/2010/main" val="727027711"/>
-      </p:ext>
-    </p:extLst>
   </p:cSld>
   <p:clrMapOvr>
     <a:masterClrMapping/>
@@ -1988,7 +1980,6 @@
           <a:p>
             <a:fld id="{5BCAD085-E8A6-8845-BD4E-CB4CCA059FC4}" type="datetimeFigureOut">
               <a:rPr lang="en-US" smtClean="0"/>
-              <a:t>1/27/13</a:t>
             </a:fld>
             <a:endParaRPr lang="en-US"/>
           </a:p>
@@ -2030,18 +2021,12 @@
           <a:p>
             <a:fld id="{C1FF6DA9-008F-8B48-92A6-B652298478BF}" type="slidenum">
               <a:rPr lang="en-US" smtClean="0"/>
-              <a:t>‹#›</a:t>
             </a:fld>
             <a:endParaRPr lang="en-US"/>
           </a:p>
         </p:txBody>
       </p:sp>
     </p:spTree>
-    <p:extLst>
-      <p:ext uri="{BB962C8B-B14F-4D97-AF65-F5344CB8AC3E}">
-        <p14:creationId xmlns:p14="http://schemas.microsoft.com/office/powerpoint/2010/main" val="1212999818"/>
-      </p:ext>
-    </p:extLst>
   </p:cSld>
   <p:clrMapOvr>
     <a:masterClrMapping/>
@@ -2151,6 +2136,7 @@
               <a:rPr lang="en-US" smtClean="0"/>
               <a:t>Click to edit Master text styles</a:t>
             </a:r>
+            <a:endParaRPr lang="en-US" smtClean="0"/>
           </a:p>
           <a:p>
             <a:pPr lvl="1"/>
@@ -2158,6 +2144,7 @@
               <a:rPr lang="en-US" smtClean="0"/>
               <a:t>Second level</a:t>
             </a:r>
+            <a:endParaRPr lang="en-US" smtClean="0"/>
           </a:p>
           <a:p>
             <a:pPr lvl="2"/>
@@ -2165,6 +2152,7 @@
               <a:rPr lang="en-US" smtClean="0"/>
               <a:t>Third level</a:t>
             </a:r>
+            <a:endParaRPr lang="en-US" smtClean="0"/>
           </a:p>
           <a:p>
             <a:pPr lvl="3"/>
@@ -2172,6 +2160,7 @@
               <a:rPr lang="en-US" smtClean="0"/>
               <a:t>Fourth level</a:t>
             </a:r>
+            <a:endParaRPr lang="en-US" smtClean="0"/>
           </a:p>
           <a:p>
             <a:pPr lvl="4"/>
@@ -2245,6 +2234,7 @@
               <a:rPr lang="en-US" smtClean="0"/>
               <a:t>Click to edit Master text styles</a:t>
             </a:r>
+            <a:endParaRPr lang="en-US" smtClean="0"/>
           </a:p>
         </p:txBody>
       </p:sp>
@@ -2265,7 +2255,6 @@
           <a:p>
             <a:fld id="{5BCAD085-E8A6-8845-BD4E-CB4CCA059FC4}" type="datetimeFigureOut">
               <a:rPr lang="en-US" smtClean="0"/>
-              <a:t>1/27/13</a:t>
             </a:fld>
             <a:endParaRPr lang="en-US"/>
           </a:p>
@@ -2307,18 +2296,12 @@
           <a:p>
             <a:fld id="{C1FF6DA9-008F-8B48-92A6-B652298478BF}" type="slidenum">
               <a:rPr lang="en-US" smtClean="0"/>
-              <a:t>‹#›</a:t>
             </a:fld>
             <a:endParaRPr lang="en-US"/>
           </a:p>
         </p:txBody>
       </p:sp>
     </p:spTree>
-    <p:extLst>
-      <p:ext uri="{BB962C8B-B14F-4D97-AF65-F5344CB8AC3E}">
-        <p14:creationId xmlns:p14="http://schemas.microsoft.com/office/powerpoint/2010/main" val="1840726560"/>
-      </p:ext>
-    </p:extLst>
   </p:cSld>
   <p:clrMapOvr>
     <a:masterClrMapping/>
@@ -2498,6 +2481,7 @@
               <a:rPr lang="en-US" smtClean="0"/>
               <a:t>Click to edit Master text styles</a:t>
             </a:r>
+            <a:endParaRPr lang="en-US" smtClean="0"/>
           </a:p>
         </p:txBody>
       </p:sp>
@@ -2518,7 +2502,6 @@
           <a:p>
             <a:fld id="{5BCAD085-E8A6-8845-BD4E-CB4CCA059FC4}" type="datetimeFigureOut">
               <a:rPr lang="en-US" smtClean="0"/>
-              <a:t>1/27/13</a:t>
             </a:fld>
             <a:endParaRPr lang="en-US"/>
           </a:p>
@@ -2560,18 +2543,12 @@
           <a:p>
             <a:fld id="{C1FF6DA9-008F-8B48-92A6-B652298478BF}" type="slidenum">
               <a:rPr lang="en-US" smtClean="0"/>
-              <a:t>‹#›</a:t>
             </a:fld>
             <a:endParaRPr lang="en-US"/>
           </a:p>
         </p:txBody>
       </p:sp>
     </p:spTree>
-    <p:extLst>
-      <p:ext uri="{BB962C8B-B14F-4D97-AF65-F5344CB8AC3E}">
-        <p14:creationId xmlns:p14="http://schemas.microsoft.com/office/powerpoint/2010/main" val="3889236939"/>
-      </p:ext>
-    </p:extLst>
   </p:cSld>
   <p:clrMapOvr>
     <a:masterClrMapping/>
@@ -2664,6 +2641,7 @@
               <a:rPr lang="en-US" smtClean="0"/>
               <a:t>Click to edit Master text styles</a:t>
             </a:r>
+            <a:endParaRPr lang="en-US" smtClean="0"/>
           </a:p>
           <a:p>
             <a:pPr lvl="1"/>
@@ -2671,6 +2649,7 @@
               <a:rPr lang="en-US" smtClean="0"/>
               <a:t>Second level</a:t>
             </a:r>
+            <a:endParaRPr lang="en-US" smtClean="0"/>
           </a:p>
           <a:p>
             <a:pPr lvl="2"/>
@@ -2678,6 +2657,7 @@
               <a:rPr lang="en-US" smtClean="0"/>
               <a:t>Third level</a:t>
             </a:r>
+            <a:endParaRPr lang="en-US" smtClean="0"/>
           </a:p>
           <a:p>
             <a:pPr lvl="3"/>
@@ -2685,6 +2665,7 @@
               <a:rPr lang="en-US" smtClean="0"/>
               <a:t>Fourth level</a:t>
             </a:r>
+            <a:endParaRPr lang="en-US" smtClean="0"/>
           </a:p>
           <a:p>
             <a:pPr lvl="4"/>
@@ -2731,7 +2712,6 @@
           <a:p>
             <a:fld id="{5BCAD085-E8A6-8845-BD4E-CB4CCA059FC4}" type="datetimeFigureOut">
               <a:rPr lang="en-US" smtClean="0"/>
-              <a:t>1/27/13</a:t>
             </a:fld>
             <a:endParaRPr lang="en-US"/>
           </a:p>
@@ -2809,18 +2789,12 @@
           <a:p>
             <a:fld id="{C1FF6DA9-008F-8B48-92A6-B652298478BF}" type="slidenum">
               <a:rPr lang="en-US" smtClean="0"/>
-              <a:t>‹#›</a:t>
             </a:fld>
             <a:endParaRPr lang="en-US"/>
           </a:p>
         </p:txBody>
       </p:sp>
     </p:spTree>
-    <p:extLst>
-      <p:ext uri="{BB962C8B-B14F-4D97-AF65-F5344CB8AC3E}">
-        <p14:creationId xmlns:p14="http://schemas.microsoft.com/office/powerpoint/2010/main" val="2209977519"/>
-      </p:ext>
-    </p:extLst>
   </p:cSld>
   <p:clrMap bg1="lt1" tx1="dk1" bg2="lt2" tx2="dk2" accent1="accent1" accent2="accent2" accent3="accent3" accent4="accent4" accent5="accent5" accent6="accent6" hlink="hlink" folHlink="folHlink"/>
   <p:sldLayoutIdLst>
@@ -2858,7 +2832,7 @@
         <a:spcBef>
           <a:spcPct val="20000"/>
         </a:spcBef>
-        <a:buFont typeface="Arial"/>
+        <a:buFont typeface="Arial" panose="020B0604020202020204"/>
         <a:buChar char="•"/>
         <a:defRPr sz="3200" kern="1200">
           <a:solidFill>
@@ -2873,7 +2847,7 @@
         <a:spcBef>
           <a:spcPct val="20000"/>
         </a:spcBef>
-        <a:buFont typeface="Arial"/>
+        <a:buFont typeface="Arial" panose="020B0604020202020204"/>
         <a:buChar char="–"/>
         <a:defRPr sz="2800" kern="1200">
           <a:solidFill>
@@ -2888,7 +2862,7 @@
         <a:spcBef>
           <a:spcPct val="20000"/>
         </a:spcBef>
-        <a:buFont typeface="Arial"/>
+        <a:buFont typeface="Arial" panose="020B0604020202020204"/>
         <a:buChar char="•"/>
         <a:defRPr sz="2400" kern="1200">
           <a:solidFill>
@@ -2903,7 +2877,7 @@
         <a:spcBef>
           <a:spcPct val="20000"/>
         </a:spcBef>
-        <a:buFont typeface="Arial"/>
+        <a:buFont typeface="Arial" panose="020B0604020202020204"/>
         <a:buChar char="–"/>
         <a:defRPr sz="2000" kern="1200">
           <a:solidFill>
@@ -2918,7 +2892,7 @@
         <a:spcBef>
           <a:spcPct val="20000"/>
         </a:spcBef>
-        <a:buFont typeface="Arial"/>
+        <a:buFont typeface="Arial" panose="020B0604020202020204"/>
         <a:buChar char="»"/>
         <a:defRPr sz="2000" kern="1200">
           <a:solidFill>
@@ -2933,7 +2907,7 @@
         <a:spcBef>
           <a:spcPct val="20000"/>
         </a:spcBef>
-        <a:buFont typeface="Arial"/>
+        <a:buFont typeface="Arial" panose="020B0604020202020204"/>
         <a:buChar char="•"/>
         <a:defRPr sz="2000" kern="1200">
           <a:solidFill>
@@ -2948,7 +2922,7 @@
         <a:spcBef>
           <a:spcPct val="20000"/>
         </a:spcBef>
-        <a:buFont typeface="Arial"/>
+        <a:buFont typeface="Arial" panose="020B0604020202020204"/>
         <a:buChar char="•"/>
         <a:defRPr sz="2000" kern="1200">
           <a:solidFill>
@@ -2963,7 +2937,7 @@
         <a:spcBef>
           <a:spcPct val="20000"/>
         </a:spcBef>
-        <a:buFont typeface="Arial"/>
+        <a:buFont typeface="Arial" panose="020B0604020202020204"/>
         <a:buChar char="•"/>
         <a:defRPr sz="2000" kern="1200">
           <a:solidFill>
@@ -2978,7 +2952,7 @@
         <a:spcBef>
           <a:spcPct val="20000"/>
         </a:spcBef>
-        <a:buFont typeface="Arial"/>
+        <a:buFont typeface="Arial" panose="020B0604020202020204"/>
         <a:buChar char="•"/>
         <a:defRPr sz="2000" kern="1200">
           <a:solidFill>
@@ -3090,7 +3064,7 @@
 </file>
 
 <file path=ppt/slides/slide1.xml><?xml version="1.0" encoding="utf-8"?>
-<p:sld xmlns:a="http://schemas.openxmlformats.org/drawingml/2006/main" xmlns:p="http://schemas.openxmlformats.org/presentationml/2006/main" xmlns:r="http://schemas.openxmlformats.org/officeDocument/2006/relationships">
+<p:sld xmlns:a="http://schemas.openxmlformats.org/drawingml/2006/main" xmlns:r="http://schemas.openxmlformats.org/officeDocument/2006/relationships" xmlns:p="http://schemas.openxmlformats.org/presentationml/2006/main">
   <p:cSld>
     <p:bg>
       <p:bgPr>
@@ -3109,14 +3083,15 @@
       <p:grpSpPr/>
       <p:pic>
         <p:nvPicPr>
-          <p:cNvPr id="2" name="Picture 1" descr="slide1_pic1.png"/>
+          <p:cNvPr id="2" name="Picture 1" descr="C:/Users/lyamf/Downloads/93a6948e96fe51c41b0f10a4bee58903.jpg93a6948e96fe51c41b0f10a4bee58903"/>
           <p:cNvPicPr>
             <a:picLocks noChangeAspect="1"/>
           </p:cNvPicPr>
           <p:nvPr/>
         </p:nvPicPr>
         <p:blipFill>
-          <a:blip r:embed="rId2"/>
+          <a:blip r:embed="rId1"/>
+          <a:srcRect t="9395" b="9395"/>
           <a:stretch>
             <a:fillRect/>
           </a:stretch>
@@ -3217,7 +3192,7 @@
               </a:defRPr>
             </a:pPr>
             <a:r>
-              <a:t>Predictive agro-meteorological intelligence for Goa's smallholder farmers across all 12 Talukas.</a:t>
+              <a:t>Predictive agro-meteorological early warnings for smallholder Goan farmers across all 12 Talukas.</a:t>
             </a:r>
           </a:p>
         </p:txBody>
@@ -3311,7 +3286,7 @@
               </a:spcAft>
             </a:pPr>
             <a:r>
-              <a:rPr b="1" sz="1200">
+              <a:rPr sz="1200" b="1">
                 <a:solidFill>
                   <a:srgbClr val="D97706"/>
                 </a:solidFill>
@@ -3328,6 +3303,12 @@
               </a:rPr>
               <a:t>Rosary College, Navelim</a:t>
             </a:r>
+            <a:endParaRPr sz="1200">
+              <a:solidFill>
+                <a:srgbClr val="FFFFFF"/>
+              </a:solidFill>
+              <a:latin typeface="Source Sans 3"/>
+            </a:endParaRPr>
           </a:p>
           <a:p>
             <a:pPr>
@@ -3336,7 +3317,7 @@
               </a:spcAft>
             </a:pPr>
             <a:r>
-              <a:rPr b="1" sz="1200">
+              <a:rPr sz="1200" b="1">
                 <a:solidFill>
                   <a:srgbClr val="D97706"/>
                 </a:solidFill>
@@ -3353,6 +3334,12 @@
               </a:rPr>
               <a:t>Agriculture &amp; Rural Innovation</a:t>
             </a:r>
+            <a:endParaRPr sz="1200">
+              <a:solidFill>
+                <a:srgbClr val="FFFFFF"/>
+              </a:solidFill>
+              <a:latin typeface="Source Sans 3"/>
+            </a:endParaRPr>
           </a:p>
         </p:txBody>
       </p:sp>
@@ -3445,7 +3432,7 @@
               </a:spcAft>
             </a:pPr>
             <a:r>
-              <a:rPr b="1" sz="1200">
+              <a:rPr sz="1200" b="1">
                 <a:solidFill>
                   <a:srgbClr val="D97706"/>
                 </a:solidFill>
@@ -3462,6 +3449,12 @@
               </a:rPr>
               <a:t>AgriWatch Goa Prototype</a:t>
             </a:r>
+            <a:endParaRPr sz="1200">
+              <a:solidFill>
+                <a:srgbClr val="FFFFFF"/>
+              </a:solidFill>
+              <a:latin typeface="Source Sans 3"/>
+            </a:endParaRPr>
           </a:p>
           <a:p>
             <a:pPr>
@@ -3470,7 +3463,7 @@
               </a:spcAft>
             </a:pPr>
             <a:r>
-              <a:rPr b="1" sz="1200">
+              <a:rPr sz="1200" b="1">
                 <a:solidFill>
                   <a:srgbClr val="D97706"/>
                 </a:solidFill>
@@ -3487,6 +3480,12 @@
               </a:rPr>
               <a:t>Low-Tech Smallholder Inclusion</a:t>
             </a:r>
+            <a:endParaRPr sz="1200">
+              <a:solidFill>
+                <a:srgbClr val="FFFFFF"/>
+              </a:solidFill>
+              <a:latin typeface="Source Sans 3"/>
+            </a:endParaRPr>
           </a:p>
         </p:txBody>
       </p:sp>
@@ -3499,7 +3498,7 @@
 </file>
 
 <file path=ppt/slides/slide10.xml><?xml version="1.0" encoding="utf-8"?>
-<p:sld xmlns:a="http://schemas.openxmlformats.org/drawingml/2006/main" xmlns:p="http://schemas.openxmlformats.org/presentationml/2006/main" xmlns:r="http://schemas.openxmlformats.org/officeDocument/2006/relationships">
+<p:sld xmlns:a="http://schemas.openxmlformats.org/drawingml/2006/main" xmlns:r="http://schemas.openxmlformats.org/officeDocument/2006/relationships" xmlns:p="http://schemas.openxmlformats.org/presentationml/2006/main">
   <p:cSld>
     <p:bg>
       <p:bgPr>
@@ -3583,7 +3582,7 @@
               </a:defRPr>
             </a:pPr>
             <a:r>
-              <a:t>Reaching smallholder farmers across Goa regardless of smartphone ownership or connectivity</a:t>
+              <a:t>Reaching Goan smallholders regardless of smartphone ownership or internet access</a:t>
             </a:r>
           </a:p>
         </p:txBody>
@@ -3677,13 +3676,13 @@
               </a:spcAft>
             </a:pPr>
             <a:r>
-              <a:rPr b="1" sz="1200">
-                <a:solidFill>
-                  <a:srgbClr val="0C2B1B"/>
-                </a:solidFill>
-                <a:latin typeface="Source Sans 3"/>
-              </a:rPr>
-              <a:t>Feature-Phone Ready: </a:t>
+              <a:rPr sz="1200" b="1">
+                <a:solidFill>
+                  <a:srgbClr val="0C2B1B"/>
+                </a:solidFill>
+                <a:latin typeface="Source Sans 3"/>
+              </a:rPr>
+              <a:t>Basic Handsets: </a:t>
             </a:r>
             <a:r>
               <a:rPr sz="1200">
@@ -3692,8 +3691,14 @@
                 </a:solidFill>
                 <a:latin typeface="Source Sans 3"/>
               </a:rPr>
-              <a:t>Concise alerts under 160 characters in native Konkani delivered to basic handsets.</a:t>
-            </a:r>
+              <a:t>&lt;160 char alerts in Konkani delivered via 2G SMS to basic phones.</a:t>
+            </a:r>
+            <a:endParaRPr sz="1200">
+              <a:solidFill>
+                <a:srgbClr val="1A2820"/>
+              </a:solidFill>
+              <a:latin typeface="Source Sans 3"/>
+            </a:endParaRPr>
           </a:p>
         </p:txBody>
       </p:sp>
@@ -3786,7 +3791,7 @@
               </a:spcAft>
             </a:pPr>
             <a:r>
-              <a:rPr b="1" sz="1200">
+              <a:rPr sz="1200" b="1">
                 <a:solidFill>
                   <a:srgbClr val="0C2B1B"/>
                 </a:solidFill>
@@ -3801,8 +3806,14 @@
                 </a:solidFill>
                 <a:latin typeface="Source Sans 3"/>
               </a:rPr>
-              <a:t>One-click pre-formatted text links for Village Panchayat farmer WhatsApp communities.</a:t>
-            </a:r>
+              <a:t>1-click pre-formatted broadcasts for Panchayat WhatsApp groups.</a:t>
+            </a:r>
+            <a:endParaRPr sz="1200">
+              <a:solidFill>
+                <a:srgbClr val="1A2820"/>
+              </a:solidFill>
+              <a:latin typeface="Source Sans 3"/>
+            </a:endParaRPr>
           </a:p>
         </p:txBody>
       </p:sp>
@@ -3895,13 +3906,13 @@
               </a:spcAft>
             </a:pPr>
             <a:r>
-              <a:rPr b="1" sz="1200">
-                <a:solidFill>
-                  <a:srgbClr val="0C2B1B"/>
-                </a:solidFill>
-                <a:latin typeface="Source Sans 3"/>
-              </a:rPr>
-              <a:t>Officer Dashboard: </a:t>
+              <a:rPr sz="1200" b="1">
+                <a:solidFill>
+                  <a:srgbClr val="0C2B1B"/>
+                </a:solidFill>
+                <a:latin typeface="Source Sans 3"/>
+              </a:rPr>
+              <a:t>Officer Console: </a:t>
             </a:r>
             <a:r>
               <a:rPr sz="1200">
@@ -3910,8 +3921,14 @@
                 </a:solidFill>
                 <a:latin typeface="Source Sans 3"/>
               </a:rPr>
-              <a:t>Interactive Streamlit web platform with GIS maps, What-If simulation, and analytics.</a:t>
-            </a:r>
+              <a:t>Interactive Streamlit platform with GIS maps and simulation.</a:t>
+            </a:r>
+            <a:endParaRPr sz="1200">
+              <a:solidFill>
+                <a:srgbClr val="1A2820"/>
+              </a:solidFill>
+              <a:latin typeface="Source Sans 3"/>
+            </a:endParaRPr>
           </a:p>
         </p:txBody>
       </p:sp>
@@ -4004,7 +4021,7 @@
               </a:spcAft>
             </a:pPr>
             <a:r>
-              <a:rPr b="1" sz="1200">
+              <a:rPr sz="1200" b="1">
                 <a:solidFill>
                   <a:srgbClr val="0C2B1B"/>
                 </a:solidFill>
@@ -4019,8 +4036,14 @@
                 </a:solidFill>
                 <a:latin typeface="Source Sans 3"/>
               </a:rPr>
-              <a:t>Printable advisory certificates for walk-in farmers at Panchayat e-Gram kiosks.</a:t>
-            </a:r>
+              <a:t>Printable advisory cards for walk-in farmers at Panchayat kiosks.</a:t>
+            </a:r>
+            <a:endParaRPr sz="1200">
+              <a:solidFill>
+                <a:srgbClr val="1A2820"/>
+              </a:solidFill>
+              <a:latin typeface="Source Sans 3"/>
+            </a:endParaRPr>
           </a:p>
         </p:txBody>
       </p:sp>
@@ -4113,13 +4136,13 @@
               </a:spcAft>
             </a:pPr>
             <a:r>
-              <a:rPr b="1" sz="1200">
-                <a:solidFill>
-                  <a:srgbClr val="0C2B1B"/>
-                </a:solidFill>
-                <a:latin typeface="Source Sans 3"/>
-              </a:rPr>
-              <a:t>Native Konkani (गोंयची राजभास): </a:t>
+              <a:rPr sz="1200" b="1">
+                <a:solidFill>
+                  <a:srgbClr val="0C2B1B"/>
+                </a:solidFill>
+                <a:latin typeface="Source Sans 3"/>
+              </a:rPr>
+              <a:t>Native Konkani: </a:t>
             </a:r>
             <a:r>
               <a:rPr sz="1200">
@@ -4128,8 +4151,14 @@
                 </a:solidFill>
                 <a:latin typeface="Source Sans 3"/>
               </a:rPr>
-              <a:t>Devanagari script removes all literacy and language barriers.</a:t>
-            </a:r>
+              <a:t>Devanagari script removes language and literacy barriers.</a:t>
+            </a:r>
+            <a:endParaRPr sz="1200">
+              <a:solidFill>
+                <a:srgbClr val="1A2820"/>
+              </a:solidFill>
+              <a:latin typeface="Source Sans 3"/>
+            </a:endParaRPr>
           </a:p>
           <a:p>
             <a:pPr>
@@ -4138,13 +4167,13 @@
               </a:spcAft>
             </a:pPr>
             <a:r>
-              <a:rPr b="1" sz="1200">
-                <a:solidFill>
-                  <a:srgbClr val="0C2B1B"/>
-                </a:solidFill>
-                <a:latin typeface="Source Sans 3"/>
-              </a:rPr>
-              <a:t>Hindi &amp; English: </a:t>
+              <a:rPr sz="1200" b="1">
+                <a:solidFill>
+                  <a:srgbClr val="0C2B1B"/>
+                </a:solidFill>
+                <a:latin typeface="Source Sans 3"/>
+              </a:rPr>
+              <a:t>State &amp; National: </a:t>
             </a:r>
             <a:r>
               <a:rPr sz="1200">
@@ -4153,8 +4182,14 @@
                 </a:solidFill>
                 <a:latin typeface="Source Sans 3"/>
               </a:rPr>
-              <a:t>Full state and national administrative accessibility.</a:t>
-            </a:r>
+              <a:t>Full Hindi and English administrative toggles.</a:t>
+            </a:r>
+            <a:endParaRPr sz="1200">
+              <a:solidFill>
+                <a:srgbClr val="1A2820"/>
+              </a:solidFill>
+              <a:latin typeface="Source Sans 3"/>
+            </a:endParaRPr>
           </a:p>
         </p:txBody>
       </p:sp>
@@ -4247,13 +4282,13 @@
               </a:spcAft>
             </a:pPr>
             <a:r>
-              <a:rPr b="1" sz="1200">
-                <a:solidFill>
-                  <a:srgbClr val="0C2B1B"/>
-                </a:solidFill>
-                <a:latin typeface="Source Sans 3"/>
-              </a:rPr>
-              <a:t>15-Minute Cooldown: </a:t>
+              <a:rPr sz="1200" b="1">
+                <a:solidFill>
+                  <a:srgbClr val="0C2B1B"/>
+                </a:solidFill>
+                <a:latin typeface="Source Sans 3"/>
+              </a:rPr>
+              <a:t>15-Min Cooldown: </a:t>
             </a:r>
             <a:r>
               <a:rPr sz="1200">
@@ -4262,8 +4297,14 @@
                 </a:solidFill>
                 <a:latin typeface="Source Sans 3"/>
               </a:rPr>
-              <a:t>Intelligent rate limiter prevents bombarding farmers if sensors fluctuate.</a:t>
-            </a:r>
+              <a:t>Rate limiting prevents alert fatigue from sensor fluctuations.</a:t>
+            </a:r>
+            <a:endParaRPr sz="1200">
+              <a:solidFill>
+                <a:srgbClr val="1A2820"/>
+              </a:solidFill>
+              <a:latin typeface="Source Sans 3"/>
+            </a:endParaRPr>
           </a:p>
           <a:p>
             <a:pPr>
@@ -4272,13 +4313,13 @@
               </a:spcAft>
             </a:pPr>
             <a:r>
-              <a:rPr b="1" sz="1200">
-                <a:solidFill>
-                  <a:srgbClr val="0C2B1B"/>
-                </a:solidFill>
-                <a:latin typeface="Source Sans 3"/>
-              </a:rPr>
-              <a:t>High-Priority Queue: </a:t>
+              <a:rPr sz="1200" b="1">
+                <a:solidFill>
+                  <a:srgbClr val="0C2B1B"/>
+                </a:solidFill>
+                <a:latin typeface="Source Sans 3"/>
+              </a:rPr>
+              <a:t>Urgent Priority: </a:t>
             </a:r>
             <a:r>
               <a:rPr sz="1200">
@@ -4287,8 +4328,14 @@
                 </a:solidFill>
                 <a:latin typeface="Source Sans 3"/>
               </a:rPr>
-              <a:t>Guarantees critical weather hazard delivery.</a:t>
-            </a:r>
+              <a:t>Guarantees immediate delivery for critical weather emergencies.</a:t>
+            </a:r>
+            <a:endParaRPr sz="1200">
+              <a:solidFill>
+                <a:srgbClr val="1A2820"/>
+              </a:solidFill>
+              <a:latin typeface="Source Sans 3"/>
+            </a:endParaRPr>
           </a:p>
         </p:txBody>
       </p:sp>
@@ -4381,13 +4428,13 @@
               </a:spcAft>
             </a:pPr>
             <a:r>
-              <a:rPr b="1" sz="1200">
-                <a:solidFill>
-                  <a:srgbClr val="0C2B1B"/>
-                </a:solidFill>
-                <a:latin typeface="Source Sans 3"/>
-              </a:rPr>
-              <a:t>Administrative Records: </a:t>
+              <a:rPr sz="1200" b="1">
+                <a:solidFill>
+                  <a:srgbClr val="0C2B1B"/>
+                </a:solidFill>
+                <a:latin typeface="Source Sans 3"/>
+              </a:rPr>
+              <a:t>Full Logging: </a:t>
             </a:r>
             <a:r>
               <a:rPr sz="1200">
@@ -4396,8 +4443,14 @@
                 </a:solidFill>
                 <a:latin typeface="Source Sans 3"/>
               </a:rPr>
-              <a:t>Every dispatched alert is permanently logged to CSV with timestamps and taluka data.</a:t>
-            </a:r>
+              <a:t>Every dispatched alert is permanently recorded with timestamps.</a:t>
+            </a:r>
+            <a:endParaRPr sz="1200">
+              <a:solidFill>
+                <a:srgbClr val="1A2820"/>
+              </a:solidFill>
+              <a:latin typeface="Source Sans 3"/>
+            </a:endParaRPr>
           </a:p>
           <a:p>
             <a:pPr>
@@ -4406,13 +4459,13 @@
               </a:spcAft>
             </a:pPr>
             <a:r>
-              <a:rPr b="1" sz="1200">
-                <a:solidFill>
-                  <a:srgbClr val="0C2B1B"/>
-                </a:solidFill>
-                <a:latin typeface="Source Sans 3"/>
-              </a:rPr>
-              <a:t>Government Export: </a:t>
+              <a:rPr sz="1200" b="1">
+                <a:solidFill>
+                  <a:srgbClr val="0C2B1B"/>
+                </a:solidFill>
+                <a:latin typeface="Source Sans 3"/>
+              </a:rPr>
+              <a:t>Official Export: </a:t>
             </a:r>
             <a:r>
               <a:rPr sz="1200">
@@ -4421,8 +4474,14 @@
                 </a:solidFill>
                 <a:latin typeface="Source Sans 3"/>
               </a:rPr>
-              <a:t>Downloadable for departmental review and subsidy verification.</a:t>
-            </a:r>
+              <a:t>Downloadable audit logs for government and insurance verification.</a:t>
+            </a:r>
+            <a:endParaRPr sz="1200">
+              <a:solidFill>
+                <a:srgbClr val="1A2820"/>
+              </a:solidFill>
+              <a:latin typeface="Source Sans 3"/>
+            </a:endParaRPr>
           </a:p>
         </p:txBody>
       </p:sp>
@@ -4498,7 +4557,7 @@
               <a:t>🌾  </a:t>
             </a:r>
             <a:r>
-              <a:rPr b="1" sz="1250">
+              <a:rPr sz="1250" b="1">
                 <a:solidFill>
                   <a:srgbClr val="0C2B1B"/>
                 </a:solidFill>
@@ -4513,8 +4572,14 @@
                 </a:solidFill>
                 <a:latin typeface="Source Sans 3"/>
               </a:rPr>
-              <a:t>A warning is useful only if it reaches the farmer. By pairing 2G SMS with native Konkani advisories, AgriWatch Goa ensures that no smallholder farmer is left behind.</a:t>
-            </a:r>
+              <a:t>Early warnings are only useful if farmers receive them. Combining 2G SMS with Konkani ensures zero exclusion.</a:t>
+            </a:r>
+            <a:endParaRPr sz="1250">
+              <a:solidFill>
+                <a:srgbClr val="1A2820"/>
+              </a:solidFill>
+              <a:latin typeface="Source Sans 3"/>
+            </a:endParaRPr>
           </a:p>
         </p:txBody>
       </p:sp>
@@ -4527,7 +4592,7 @@
 </file>
 
 <file path=ppt/slides/slide11.xml><?xml version="1.0" encoding="utf-8"?>
-<p:sld xmlns:a="http://schemas.openxmlformats.org/drawingml/2006/main" xmlns:p="http://schemas.openxmlformats.org/presentationml/2006/main" xmlns:r="http://schemas.openxmlformats.org/officeDocument/2006/relationships">
+<p:sld xmlns:a="http://schemas.openxmlformats.org/drawingml/2006/main" xmlns:r="http://schemas.openxmlformats.org/officeDocument/2006/relationships" xmlns:p="http://schemas.openxmlformats.org/presentationml/2006/main">
   <p:cSld>
     <p:bg>
       <p:bgPr>
@@ -4705,13 +4770,13 @@
               </a:spcAft>
             </a:pPr>
             <a:r>
-              <a:rPr b="1" sz="1200">
-                <a:solidFill>
-                  <a:srgbClr val="0C2B1B"/>
-                </a:solidFill>
-                <a:latin typeface="Source Sans 3"/>
-              </a:rPr>
-              <a:t>Minimal Data Footprint: </a:t>
+              <a:rPr sz="1200" b="1">
+                <a:solidFill>
+                  <a:srgbClr val="0C2B1B"/>
+                </a:solidFill>
+                <a:latin typeface="Source Sans 3"/>
+              </a:rPr>
+              <a:t>Minimal Footprint: </a:t>
             </a:r>
             <a:r>
               <a:rPr sz="1200">
@@ -4720,8 +4785,14 @@
                 </a:solidFill>
                 <a:latin typeface="Source Sans 3"/>
               </a:rPr>
-              <a:t>The prototype minimizes personal-data collection, processing only environmental telemetry and anonymous parcel coordinates.</a:t>
-            </a:r>
+              <a:t>Processes only environmental telemetry and anonymous plot coordinates.</a:t>
+            </a:r>
+            <a:endParaRPr sz="1200">
+              <a:solidFill>
+                <a:srgbClr val="1A2820"/>
+              </a:solidFill>
+              <a:latin typeface="Source Sans 3"/>
+            </a:endParaRPr>
           </a:p>
           <a:p>
             <a:pPr>
@@ -4730,13 +4801,13 @@
               </a:spcAft>
             </a:pPr>
             <a:r>
-              <a:rPr b="1" sz="1200">
-                <a:solidFill>
-                  <a:srgbClr val="0C2B1B"/>
-                </a:solidFill>
-                <a:latin typeface="Source Sans 3"/>
-              </a:rPr>
-              <a:t>No Farmer Surveillance: </a:t>
+              <a:rPr sz="1200" b="1">
+                <a:solidFill>
+                  <a:srgbClr val="0C2B1B"/>
+                </a:solidFill>
+                <a:latin typeface="Source Sans 3"/>
+              </a:rPr>
+              <a:t>Zero Surveillance: </a:t>
             </a:r>
             <a:r>
               <a:rPr sz="1200">
@@ -4745,8 +4816,14 @@
                 </a:solidFill>
                 <a:latin typeface="Source Sans 3"/>
               </a:rPr>
-              <a:t>Does not harvest sensitive personal credentials or financial records, ensuring strict public-sector data privacy compliance.</a:t>
-            </a:r>
+              <a:t>Collects no personal, financial, or banking credentials.</a:t>
+            </a:r>
+            <a:endParaRPr sz="1200">
+              <a:solidFill>
+                <a:srgbClr val="1A2820"/>
+              </a:solidFill>
+              <a:latin typeface="Source Sans 3"/>
+            </a:endParaRPr>
           </a:p>
         </p:txBody>
       </p:sp>
@@ -4839,13 +4916,13 @@
               </a:spcAft>
             </a:pPr>
             <a:r>
-              <a:rPr b="1" sz="1200">
-                <a:solidFill>
-                  <a:srgbClr val="0C2B1B"/>
-                </a:solidFill>
-                <a:latin typeface="Source Sans 3"/>
-              </a:rPr>
-              <a:t>Feature Importance Attribution: </a:t>
+              <a:rPr sz="1200" b="1">
+                <a:solidFill>
+                  <a:srgbClr val="0C2B1B"/>
+                </a:solidFill>
+                <a:latin typeface="Source Sans 3"/>
+              </a:rPr>
+              <a:t>Transparent Attribution: </a:t>
             </a:r>
             <a:r>
               <a:rPr sz="1200">
@@ -4854,8 +4931,14 @@
                 </a:solidFill>
                 <a:latin typeface="Source Sans 3"/>
               </a:rPr>
-              <a:t>Every prediction includes transparent feature-importance information (Gini impurity weights &amp; radar plots).</a:t>
-            </a:r>
+              <a:t>Every prediction exposes Gini impurity weights and radar breakdowns.</a:t>
+            </a:r>
+            <a:endParaRPr sz="1200">
+              <a:solidFill>
+                <a:srgbClr val="1A2820"/>
+              </a:solidFill>
+              <a:latin typeface="Source Sans 3"/>
+            </a:endParaRPr>
           </a:p>
           <a:p>
             <a:pPr>
@@ -4864,13 +4947,13 @@
               </a:spcAft>
             </a:pPr>
             <a:r>
-              <a:rPr b="1" sz="1200">
-                <a:solidFill>
-                  <a:srgbClr val="0C2B1B"/>
-                </a:solidFill>
-                <a:latin typeface="Source Sans 3"/>
-              </a:rPr>
-              <a:t>No Black Box AI: </a:t>
+              <a:rPr sz="1200" b="1">
+                <a:solidFill>
+                  <a:srgbClr val="0C2B1B"/>
+                </a:solidFill>
+                <a:latin typeface="Source Sans 3"/>
+              </a:rPr>
+              <a:t>Zero Black Box: </a:t>
             </a:r>
             <a:r>
               <a:rPr sz="1200">
@@ -4879,8 +4962,14 @@
                 </a:solidFill>
                 <a:latin typeface="Source Sans 3"/>
               </a:rPr>
-              <a:t>Agricultural officers see exactly which environmental variables (e.g. soil moisture, dry streaks) drove the risk alert.</a:t>
-            </a:r>
+              <a:t>Officers see exactly which environmental factors triggered the alert.</a:t>
+            </a:r>
+            <a:endParaRPr sz="1200">
+              <a:solidFill>
+                <a:srgbClr val="1A2820"/>
+              </a:solidFill>
+              <a:latin typeface="Source Sans 3"/>
+            </a:endParaRPr>
           </a:p>
         </p:txBody>
       </p:sp>
@@ -4973,13 +5062,13 @@
               </a:spcAft>
             </a:pPr>
             <a:r>
-              <a:rPr b="1" sz="1200">
-                <a:solidFill>
-                  <a:srgbClr val="0C2B1B"/>
-                </a:solidFill>
-                <a:latin typeface="Source Sans 3"/>
-              </a:rPr>
-              <a:t>Decision Support, Not Replacement: </a:t>
+              <a:rPr sz="1200" b="1">
+                <a:solidFill>
+                  <a:srgbClr val="0C2B1B"/>
+                </a:solidFill>
+                <a:latin typeface="Source Sans 3"/>
+              </a:rPr>
+              <a:t>Decision Support: </a:t>
             </a:r>
             <a:r>
               <a:rPr sz="1200">
@@ -4988,8 +5077,14 @@
                 </a:solidFill>
                 <a:latin typeface="Source Sans 3"/>
               </a:rPr>
-              <a:t>AI provides decision support; agriculture officers and ZAO experts remain responsible for final advisory decisions.</a:t>
-            </a:r>
+              <a:t>AI assists rather than replaces; agricultural officers hold final authority.</a:t>
+            </a:r>
+            <a:endParaRPr sz="1200">
+              <a:solidFill>
+                <a:srgbClr val="1A2820"/>
+              </a:solidFill>
+              <a:latin typeface="Source Sans 3"/>
+            </a:endParaRPr>
           </a:p>
           <a:p>
             <a:pPr>
@@ -4998,13 +5093,13 @@
               </a:spcAft>
             </a:pPr>
             <a:r>
-              <a:rPr b="1" sz="1200">
-                <a:solidFill>
-                  <a:srgbClr val="0C2B1B"/>
-                </a:solidFill>
-                <a:latin typeface="Source Sans 3"/>
-              </a:rPr>
-              <a:t>Manual Override &amp; Verification: </a:t>
+              <a:rPr sz="1200" b="1">
+                <a:solidFill>
+                  <a:srgbClr val="0C2B1B"/>
+                </a:solidFill>
+                <a:latin typeface="Source Sans 3"/>
+              </a:rPr>
+              <a:t>Human Override: </a:t>
             </a:r>
             <a:r>
               <a:rPr sz="1200">
@@ -5013,8 +5108,14 @@
                 </a:solidFill>
                 <a:latin typeface="Source Sans 3"/>
               </a:rPr>
-              <a:t>Officers review, modify, or approve automated hazard warnings before bulk dispatch to village farmers.</a:t>
-            </a:r>
+              <a:t>Officers review and validate hazard warnings before bulk dispatch.</a:t>
+            </a:r>
+            <a:endParaRPr sz="1200">
+              <a:solidFill>
+                <a:srgbClr val="1A2820"/>
+              </a:solidFill>
+              <a:latin typeface="Source Sans 3"/>
+            </a:endParaRPr>
           </a:p>
         </p:txBody>
       </p:sp>
@@ -5107,13 +5208,13 @@
               </a:spcAft>
             </a:pPr>
             <a:r>
-              <a:rPr b="1" sz="1200">
-                <a:solidFill>
-                  <a:srgbClr val="0C2B1B"/>
-                </a:solidFill>
-                <a:latin typeface="Source Sans 3"/>
-              </a:rPr>
-              <a:t>Disclosed Training Data: </a:t>
+              <a:rPr sz="1200" b="1">
+                <a:solidFill>
+                  <a:srgbClr val="0C2B1B"/>
+                </a:solidFill>
+                <a:latin typeface="Source Sans 3"/>
+              </a:rPr>
+              <a:t>Dataset Honesty: </a:t>
             </a:r>
             <a:r>
               <a:rPr sz="1200">
@@ -5122,8 +5223,14 @@
                 </a:solidFill>
                 <a:latin typeface="Source Sans 3"/>
               </a:rPr>
-              <a:t>Synthetic training datasets and model boundaries are explicitly disclosed to prevent false claims.</a:t>
-            </a:r>
+              <a:t>Synthetic baseline training and model limits are explicitly disclosed.</a:t>
+            </a:r>
+            <a:endParaRPr sz="1200">
+              <a:solidFill>
+                <a:srgbClr val="1A2820"/>
+              </a:solidFill>
+              <a:latin typeface="Source Sans 3"/>
+            </a:endParaRPr>
           </a:p>
           <a:p>
             <a:pPr>
@@ -5132,13 +5239,13 @@
               </a:spcAft>
             </a:pPr>
             <a:r>
-              <a:rPr b="1" sz="1200">
-                <a:solidFill>
-                  <a:srgbClr val="0C2B1B"/>
-                </a:solidFill>
-                <a:latin typeface="Source Sans 3"/>
-              </a:rPr>
-              <a:t>Auditable Technology Stack: </a:t>
+              <a:rPr sz="1200" b="1">
+                <a:solidFill>
+                  <a:srgbClr val="0C2B1B"/>
+                </a:solidFill>
+                <a:latin typeface="Source Sans 3"/>
+              </a:rPr>
+              <a:t>Open Governance: </a:t>
             </a:r>
             <a:r>
               <a:rPr sz="1200">
@@ -5147,8 +5254,14 @@
                 </a:solidFill>
                 <a:latin typeface="Source Sans 3"/>
               </a:rPr>
-              <a:t>Open architecture built on Scikit-learn, Python, and ICAR agronomy guidelines with full audit logging.</a:t>
-            </a:r>
+              <a:t>Built on Scikit-learn, Python, and ICAR agronomy with complete audit trails.</a:t>
+            </a:r>
+            <a:endParaRPr sz="1200">
+              <a:solidFill>
+                <a:srgbClr val="1A2820"/>
+              </a:solidFill>
+              <a:latin typeface="Source Sans 3"/>
+            </a:endParaRPr>
           </a:p>
         </p:txBody>
       </p:sp>
@@ -5224,7 +5337,7 @@
               <a:t>⚖️  </a:t>
             </a:r>
             <a:r>
-              <a:rPr b="1" sz="1250">
+              <a:rPr sz="1250" b="1">
                 <a:solidFill>
                   <a:srgbClr val="0C2B1B"/>
                 </a:solidFill>
@@ -5239,8 +5352,14 @@
                 </a:solidFill>
                 <a:latin typeface="Source Sans 3"/>
               </a:rPr>
-              <a:t>The system is designed as an agricultural decision-support tool, not an autonomous decision-maker. Agricultural officers remain responsible for final validation.</a:t>
-            </a:r>
+              <a:t>Designed as an accountable decision-support tool where agricultural officers retain final validation authority.</a:t>
+            </a:r>
+            <a:endParaRPr sz="1250">
+              <a:solidFill>
+                <a:srgbClr val="1A2820"/>
+              </a:solidFill>
+              <a:latin typeface="Source Sans 3"/>
+            </a:endParaRPr>
           </a:p>
         </p:txBody>
       </p:sp>
@@ -5253,7 +5372,7 @@
 </file>
 
 <file path=ppt/slides/slide12.xml><?xml version="1.0" encoding="utf-8"?>
-<p:sld xmlns:a="http://schemas.openxmlformats.org/drawingml/2006/main" xmlns:p="http://schemas.openxmlformats.org/presentationml/2006/main" xmlns:r="http://schemas.openxmlformats.org/officeDocument/2006/relationships">
+<p:sld xmlns:a="http://schemas.openxmlformats.org/drawingml/2006/main" xmlns:r="http://schemas.openxmlformats.org/officeDocument/2006/relationships" xmlns:p="http://schemas.openxmlformats.org/presentationml/2006/main">
   <p:cSld>
     <p:bg>
       <p:bgPr>
@@ -5308,49 +5427,13 @@
       </p:sp>
       <p:sp>
         <p:nvSpPr>
-          <p:cNvPr id="3" name="TextBox 2"/>
-          <p:cNvSpPr txBox="1"/>
-          <p:nvPr/>
-        </p:nvSpPr>
-        <p:spPr>
-          <a:xfrm>
-            <a:off x="731520" y="960120"/>
-            <a:ext cx="10725912" cy="320040"/>
-          </a:xfrm>
-          <a:prstGeom prst="rect">
-            <a:avLst/>
-          </a:prstGeom>
-          <a:noFill/>
-        </p:spPr>
-        <p:txBody>
-          <a:bodyPr wrap="square" lIns="0" tIns="0" rIns="0" bIns="0">
-            <a:spAutoFit/>
-          </a:bodyPr>
-          <a:lstStyle/>
-          <a:p>
-            <a:pPr>
-              <a:defRPr sz="1300">
-                <a:solidFill>
-                  <a:srgbClr val="4A6B56"/>
-                </a:solidFill>
-                <a:latin typeface="Source Sans 3"/>
-              </a:defRPr>
-            </a:pPr>
-            <a:r>
-              <a:t>A phased implementation roadmap and expansion blueprint for state-wide agricultural integration</a:t>
-            </a:r>
-          </a:p>
-        </p:txBody>
-      </p:sp>
-      <p:sp>
-        <p:nvSpPr>
           <p:cNvPr id="4" name="Rounded Rectangle 3"/>
           <p:cNvSpPr/>
           <p:nvPr/>
         </p:nvSpPr>
         <p:spPr>
           <a:xfrm>
-            <a:off x="731520" y="1417320"/>
+            <a:off x="731520" y="1257300"/>
             <a:ext cx="5212080" cy="1143000"/>
           </a:xfrm>
           <a:prstGeom prst="roundRect">
@@ -5395,7 +5478,7 @@
         </p:nvSpPr>
         <p:spPr>
           <a:xfrm>
-            <a:off x="896112" y="1545336"/>
+            <a:off x="896112" y="1281176"/>
             <a:ext cx="4882896" cy="886968"/>
           </a:xfrm>
           <a:prstGeom prst="rect">
@@ -5431,7 +5514,7 @@
               </a:spcAft>
             </a:pPr>
             <a:r>
-              <a:rPr b="1" sz="1200">
+              <a:rPr sz="1200" b="1">
                 <a:solidFill>
                   <a:srgbClr val="0C2B1B"/>
                 </a:solidFill>
@@ -5446,8 +5529,14 @@
                 </a:solidFill>
                 <a:latin typeface="Source Sans 3"/>
               </a:rPr>
-              <a:t>Deploy at ZAO (Zonal Agricultural Offices) and agricultural institutions (ICAR-CCARI Old Goa).</a:t>
-            </a:r>
+              <a:t>Deploy across Zonal Agricultural Offices &amp; ICAR-CCARI Old Goa.</a:t>
+            </a:r>
+            <a:endParaRPr sz="1200">
+              <a:solidFill>
+                <a:srgbClr val="1A2820"/>
+              </a:solidFill>
+              <a:latin typeface="Source Sans 3"/>
+            </a:endParaRPr>
           </a:p>
           <a:p>
             <a:pPr>
@@ -5456,13 +5545,13 @@
               </a:spcAft>
             </a:pPr>
             <a:r>
-              <a:rPr b="1" sz="1200">
-                <a:solidFill>
-                  <a:srgbClr val="0C2B1B"/>
-                </a:solidFill>
-                <a:latin typeface="Source Sans 3"/>
-              </a:rPr>
-              <a:t>Model Calibration: </a:t>
+              <a:rPr sz="1200" b="1">
+                <a:solidFill>
+                  <a:srgbClr val="0C2B1B"/>
+                </a:solidFill>
+                <a:latin typeface="Source Sans 3"/>
+              </a:rPr>
+              <a:t>Model Tuning: </a:t>
             </a:r>
             <a:r>
               <a:rPr sz="1200">
@@ -5471,8 +5560,14 @@
                 </a:solidFill>
                 <a:latin typeface="Source Sans 3"/>
               </a:rPr>
-              <a:t>Field-validate synthetic models against actual Goan monsoon crop seasons.</a:t>
-            </a:r>
+              <a:t>Calibrate synthetic models against actual Goan monsoon field data.</a:t>
+            </a:r>
+            <a:endParaRPr sz="1200">
+              <a:solidFill>
+                <a:srgbClr val="1A2820"/>
+              </a:solidFill>
+              <a:latin typeface="Source Sans 3"/>
+            </a:endParaRPr>
           </a:p>
         </p:txBody>
       </p:sp>
@@ -5484,7 +5579,7 @@
         </p:nvSpPr>
         <p:spPr>
           <a:xfrm>
-            <a:off x="731520" y="2697480"/>
+            <a:off x="731520" y="2564765"/>
             <a:ext cx="5212080" cy="1143000"/>
           </a:xfrm>
           <a:prstGeom prst="roundRect">
@@ -5529,7 +5624,7 @@
         </p:nvSpPr>
         <p:spPr>
           <a:xfrm>
-            <a:off x="896112" y="2825496"/>
+            <a:off x="896112" y="2629281"/>
             <a:ext cx="4882896" cy="886968"/>
           </a:xfrm>
           <a:prstGeom prst="rect">
@@ -5565,13 +5660,13 @@
               </a:spcAft>
             </a:pPr>
             <a:r>
-              <a:rPr b="1" sz="1200">
-                <a:solidFill>
-                  <a:srgbClr val="0C2B1B"/>
-                </a:solidFill>
-                <a:latin typeface="Source Sans 3"/>
-              </a:rPr>
-              <a:t>Panchayat Kiosks: </a:t>
+              <a:rPr sz="1200" b="1">
+                <a:solidFill>
+                  <a:srgbClr val="0C2B1B"/>
+                </a:solidFill>
+                <a:latin typeface="Source Sans 3"/>
+              </a:rPr>
+              <a:t>Panchayat Rollout: </a:t>
             </a:r>
             <a:r>
               <a:rPr sz="1200">
@@ -5580,8 +5675,14 @@
                 </a:solidFill>
                 <a:latin typeface="Source Sans 3"/>
               </a:rPr>
-              <a:t>Integrate into 190+ Village Panchayat e-Gram kiosks across Goa.</a:t>
-            </a:r>
+              <a:t>Deploy printable Kisan Cards across 190+ e-Gram kiosks.</a:t>
+            </a:r>
+            <a:endParaRPr sz="1200">
+              <a:solidFill>
+                <a:srgbClr val="1A2820"/>
+              </a:solidFill>
+              <a:latin typeface="Source Sans 3"/>
+            </a:endParaRPr>
           </a:p>
           <a:p>
             <a:pPr>
@@ -5590,13 +5691,13 @@
               </a:spcAft>
             </a:pPr>
             <a:r>
-              <a:rPr b="1" sz="1200">
-                <a:solidFill>
-                  <a:srgbClr val="0C2B1B"/>
-                </a:solidFill>
-                <a:latin typeface="Source Sans 3"/>
-              </a:rPr>
-              <a:t>Walk-in Services: </a:t>
+              <a:rPr sz="1200" b="1">
+                <a:solidFill>
+                  <a:srgbClr val="0C2B1B"/>
+                </a:solidFill>
+                <a:latin typeface="Source Sans 3"/>
+              </a:rPr>
+              <a:t>Farmer Onboarding: </a:t>
             </a:r>
             <a:r>
               <a:rPr sz="1200">
@@ -5605,8 +5706,14 @@
                 </a:solidFill>
                 <a:latin typeface="Source Sans 3"/>
               </a:rPr>
-              <a:t>Enable printable Kisan Cards and train Krishi Mitras for local farmer onboarding.</a:t>
-            </a:r>
+              <a:t>Train local Krishi Mitras for village outreach.</a:t>
+            </a:r>
+            <a:endParaRPr sz="1200">
+              <a:solidFill>
+                <a:srgbClr val="1A2820"/>
+              </a:solidFill>
+              <a:latin typeface="Source Sans 3"/>
+            </a:endParaRPr>
           </a:p>
         </p:txBody>
       </p:sp>
@@ -5618,7 +5725,7 @@
         </p:nvSpPr>
         <p:spPr>
           <a:xfrm>
-            <a:off x="731520" y="3977639"/>
+            <a:off x="731520" y="3879849"/>
             <a:ext cx="5212080" cy="1143000"/>
           </a:xfrm>
           <a:prstGeom prst="roundRect">
@@ -5663,8 +5770,8 @@
         </p:nvSpPr>
         <p:spPr>
           <a:xfrm>
-            <a:off x="896112" y="4105655"/>
-            <a:ext cx="4882896" cy="886968"/>
+            <a:off x="896112" y="3977385"/>
+            <a:ext cx="4882896" cy="1082040"/>
           </a:xfrm>
           <a:prstGeom prst="rect">
             <a:avLst/>
@@ -5699,13 +5806,13 @@
               </a:spcAft>
             </a:pPr>
             <a:r>
-              <a:rPr b="1" sz="1200">
-                <a:solidFill>
-                  <a:srgbClr val="0C2B1B"/>
-                </a:solidFill>
-                <a:latin typeface="Source Sans 3"/>
-              </a:rPr>
-              <a:t>Multi-Channel Delivery: </a:t>
+              <a:rPr sz="1200" b="1">
+                <a:solidFill>
+                  <a:srgbClr val="0C2B1B"/>
+                </a:solidFill>
+                <a:latin typeface="Source Sans 3"/>
+              </a:rPr>
+              <a:t>Omnichannel Scale: </a:t>
             </a:r>
             <a:r>
               <a:rPr sz="1200">
@@ -5714,8 +5821,14 @@
                 </a:solidFill>
                 <a:latin typeface="Source Sans 3"/>
               </a:rPr>
-              <a:t>Scale automated 2G SMS alerts, WhatsApp village broadcasts &amp; Krishi call-centre integration.</a:t>
-            </a:r>
+              <a:t>Automate SMS, WhatsApp broadcasts, and Krishi call-centers.</a:t>
+            </a:r>
+            <a:endParaRPr sz="1200">
+              <a:solidFill>
+                <a:srgbClr val="1A2820"/>
+              </a:solidFill>
+              <a:latin typeface="Source Sans 3"/>
+            </a:endParaRPr>
           </a:p>
           <a:p>
             <a:pPr>
@@ -5724,13 +5837,13 @@
               </a:spcAft>
             </a:pPr>
             <a:r>
-              <a:rPr b="1" sz="1200">
-                <a:solidFill>
-                  <a:srgbClr val="0C2B1B"/>
-                </a:solidFill>
-                <a:latin typeface="Source Sans 3"/>
-              </a:rPr>
-              <a:t>State-Wide Coverage: </a:t>
+              <a:rPr sz="1200" b="1">
+                <a:solidFill>
+                  <a:srgbClr val="0C2B1B"/>
+                </a:solidFill>
+                <a:latin typeface="Source Sans 3"/>
+              </a:rPr>
+              <a:t>Full State Reach: </a:t>
             </a:r>
             <a:r>
               <a:rPr sz="1200">
@@ -5739,8 +5852,14 @@
                 </a:solidFill>
                 <a:latin typeface="Source Sans 3"/>
               </a:rPr>
-              <a:t>Reach smallholder farmers across all 12 Talukas in native Konkani (देवनागरी).</a:t>
-            </a:r>
+              <a:t>Coverage for smallholder farmers across all 12 Talukas.</a:t>
+            </a:r>
+            <a:endParaRPr sz="1200">
+              <a:solidFill>
+                <a:srgbClr val="1A2820"/>
+              </a:solidFill>
+              <a:latin typeface="Source Sans 3"/>
+            </a:endParaRPr>
           </a:p>
         </p:txBody>
       </p:sp>
@@ -5752,8 +5871,8 @@
         </p:nvSpPr>
         <p:spPr>
           <a:xfrm>
-            <a:off x="6217920" y="1417320"/>
-            <a:ext cx="5212080" cy="3703320"/>
+            <a:off x="6217920" y="1281430"/>
+            <a:ext cx="5212080" cy="3983355"/>
           </a:xfrm>
           <a:prstGeom prst="roundRect">
             <a:avLst/>
@@ -5797,8 +5916,8 @@
         </p:nvSpPr>
         <p:spPr>
           <a:xfrm>
-            <a:off x="6382512" y="1545336"/>
-            <a:ext cx="4882896" cy="3447287"/>
+            <a:off x="6483350" y="1417320"/>
+            <a:ext cx="4680585" cy="3099435"/>
           </a:xfrm>
           <a:prstGeom prst="rect">
             <a:avLst/>
@@ -5807,7 +5926,7 @@
         </p:spPr>
         <p:txBody>
           <a:bodyPr wrap="square" lIns="0" tIns="0" rIns="0" bIns="0">
-            <a:spAutoFit/>
+            <a:noAutofit/>
           </a:bodyPr>
           <a:lstStyle/>
           <a:p>
@@ -5833,13 +5952,13 @@
               </a:spcAft>
             </a:pPr>
             <a:r>
-              <a:rPr b="1" sz="1200">
-                <a:solidFill>
-                  <a:srgbClr val="0C2B1B"/>
-                </a:solidFill>
-                <a:latin typeface="Source Sans 3"/>
-              </a:rPr>
-              <a:t>📡 Real Farm Sensor Data: </a:t>
+              <a:rPr sz="1200" b="1">
+                <a:solidFill>
+                  <a:srgbClr val="0C2B1B"/>
+                </a:solidFill>
+                <a:latin typeface="Source Sans 3"/>
+              </a:rPr>
+              <a:t>📡 In-Field IoT: </a:t>
             </a:r>
             <a:r>
               <a:rPr sz="1200">
@@ -5848,8 +5967,14 @@
                 </a:solidFill>
                 <a:latin typeface="Source Sans 3"/>
               </a:rPr>
-              <a:t>Deploy IoT capacitive soil moisture, temperature &amp; humidity probes in Khazan and Morod lands.</a:t>
-            </a:r>
+              <a:t>Capacitive moisture &amp; microclimate probes in Khazan/Morod lands.</a:t>
+            </a:r>
+            <a:endParaRPr sz="1200">
+              <a:solidFill>
+                <a:srgbClr val="1A2820"/>
+              </a:solidFill>
+              <a:latin typeface="Source Sans 3"/>
+            </a:endParaRPr>
           </a:p>
           <a:p>
             <a:pPr>
@@ -5858,13 +5983,13 @@
               </a:spcAft>
             </a:pPr>
             <a:r>
-              <a:rPr b="1" sz="1200">
-                <a:solidFill>
-                  <a:srgbClr val="0C2B1B"/>
-                </a:solidFill>
-                <a:latin typeface="Source Sans 3"/>
-              </a:rPr>
-              <a:t>🛰️ Satellite / NDVI Integration: </a:t>
+              <a:rPr sz="1200" b="1">
+                <a:solidFill>
+                  <a:srgbClr val="0C2B1B"/>
+                </a:solidFill>
+                <a:latin typeface="Source Sans 3"/>
+              </a:rPr>
+              <a:t>🛰️ Satellite NDVI: </a:t>
             </a:r>
             <a:r>
               <a:rPr sz="1200">
@@ -5873,8 +5998,14 @@
                 </a:solidFill>
                 <a:latin typeface="Source Sans 3"/>
               </a:rPr>
-              <a:t>Integrate Sentinel-2 / Landsat multispectral imagery for regional crop canopy stress mapping.</a:t>
-            </a:r>
+              <a:t>Sentinel-2 / Landsat imagery for regional canopy stress mapping.</a:t>
+            </a:r>
+            <a:endParaRPr sz="1200">
+              <a:solidFill>
+                <a:srgbClr val="1A2820"/>
+              </a:solidFill>
+              <a:latin typeface="Source Sans 3"/>
+            </a:endParaRPr>
           </a:p>
           <a:p>
             <a:pPr>
@@ -5883,13 +6014,13 @@
               </a:spcAft>
             </a:pPr>
             <a:r>
-              <a:rPr b="1" sz="1200">
-                <a:solidFill>
-                  <a:srgbClr val="0C2B1B"/>
-                </a:solidFill>
-                <a:latin typeface="Source Sans 3"/>
-              </a:rPr>
-              <a:t>📊 Larger Real-World Datasets: </a:t>
+              <a:rPr sz="1200" b="1">
+                <a:solidFill>
+                  <a:srgbClr val="0C2B1B"/>
+                </a:solidFill>
+                <a:latin typeface="Source Sans 3"/>
+              </a:rPr>
+              <a:t>📊 Historical Data: </a:t>
             </a:r>
             <a:r>
               <a:rPr sz="1200">
@@ -5898,8 +6029,14 @@
                 </a:solidFill>
                 <a:latin typeface="Source Sans 3"/>
               </a:rPr>
-              <a:t>Expand from synthetic datasets to multi-year historical climate and harvest yield data across Goa.</a:t>
-            </a:r>
+              <a:t>Integrate multi-decade Goan climate and harvest archives.</a:t>
+            </a:r>
+            <a:endParaRPr sz="1200">
+              <a:solidFill>
+                <a:srgbClr val="1A2820"/>
+              </a:solidFill>
+              <a:latin typeface="Source Sans 3"/>
+            </a:endParaRPr>
           </a:p>
           <a:p>
             <a:pPr>
@@ -5908,13 +6045,13 @@
               </a:spcAft>
             </a:pPr>
             <a:r>
-              <a:rPr b="1" sz="1200">
-                <a:solidFill>
-                  <a:srgbClr val="0C2B1B"/>
-                </a:solidFill>
-                <a:latin typeface="Source Sans 3"/>
-              </a:rPr>
-              <a:t>🔬 Field Validation with Experts: </a:t>
+              <a:rPr sz="1200" b="1">
+                <a:solidFill>
+                  <a:srgbClr val="0C2B1B"/>
+                </a:solidFill>
+                <a:latin typeface="Source Sans 3"/>
+              </a:rPr>
+              <a:t>🔬 Scientific Trials: </a:t>
             </a:r>
             <a:r>
               <a:rPr sz="1200">
@@ -5923,8 +6060,14 @@
                 </a:solidFill>
                 <a:latin typeface="Source Sans 3"/>
               </a:rPr>
-              <a:t>Partner with ICAR-CCARI scientists and Goa Directorate of Agriculture for rigorous field verification.</a:t>
-            </a:r>
+              <a:t>Longitudinal field trials with ICAR-CCARI and Directorate of Agriculture.</a:t>
+            </a:r>
+            <a:endParaRPr sz="1200">
+              <a:solidFill>
+                <a:srgbClr val="1A2820"/>
+              </a:solidFill>
+              <a:latin typeface="Source Sans 3"/>
+            </a:endParaRPr>
           </a:p>
           <a:p>
             <a:pPr>
@@ -5933,13 +6076,13 @@
               </a:spcAft>
             </a:pPr>
             <a:r>
-              <a:rPr b="1" sz="1200">
-                <a:solidFill>
-                  <a:srgbClr val="0C2B1B"/>
-                </a:solidFill>
-                <a:latin typeface="Source Sans 3"/>
-              </a:rPr>
-              <a:t>🌿 Improved Disease Models: </a:t>
+              <a:rPr sz="1200" b="1">
+                <a:solidFill>
+                  <a:srgbClr val="0C2B1B"/>
+                </a:solidFill>
+                <a:latin typeface="Source Sans 3"/>
+              </a:rPr>
+              <a:t>🌿 Expanded Vision: </a:t>
             </a:r>
             <a:r>
               <a:rPr sz="1200">
@@ -5948,8 +6091,14 @@
                 </a:solidFill>
                 <a:latin typeface="Source Sans 3"/>
               </a:rPr>
-              <a:t>Train deep learning computer vision on larger Goan foliar datasets (Cashew Shoot Blight, Arecanut Koleroga).</a:t>
-            </a:r>
+              <a:t>Train models for Cashew Shoot Blight &amp; Arecanut Koleroga.</a:t>
+            </a:r>
+            <a:endParaRPr sz="1200">
+              <a:solidFill>
+                <a:srgbClr val="1A2820"/>
+              </a:solidFill>
+              <a:latin typeface="Source Sans 3"/>
+            </a:endParaRPr>
           </a:p>
           <a:p>
             <a:pPr>
@@ -5958,13 +6107,13 @@
               </a:spcAft>
             </a:pPr>
             <a:r>
-              <a:rPr b="1" sz="1200">
-                <a:solidFill>
-                  <a:srgbClr val="0C2B1B"/>
-                </a:solidFill>
-                <a:latin typeface="Source Sans 3"/>
-              </a:rPr>
-              <a:t>🏛️ Government System Integration: </a:t>
+              <a:rPr sz="1200" b="1">
+                <a:solidFill>
+                  <a:srgbClr val="0C2B1B"/>
+                </a:solidFill>
+                <a:latin typeface="Source Sans 3"/>
+              </a:rPr>
+              <a:t>🏛️ Govt Integration: </a:t>
             </a:r>
             <a:r>
               <a:rPr sz="1200">
@@ -5973,8 +6122,14 @@
                 </a:solidFill>
                 <a:latin typeface="Source Sans 3"/>
               </a:rPr>
-              <a:t>Connect with PMFBY crop insurance portals and Goa Krishi Card database for automatic subsidy verification.</a:t>
-            </a:r>
+              <a:t>Direct links to PMFBY insurance claims and Goa Krishi Card databases.</a:t>
+            </a:r>
+            <a:endParaRPr sz="1200">
+              <a:solidFill>
+                <a:srgbClr val="1A2820"/>
+              </a:solidFill>
+              <a:latin typeface="Source Sans 3"/>
+            </a:endParaRPr>
           </a:p>
         </p:txBody>
       </p:sp>
@@ -5986,7 +6141,7 @@
         </p:nvSpPr>
         <p:spPr>
           <a:xfrm>
-            <a:off x="731520" y="5303520"/>
+            <a:off x="2115820" y="5386070"/>
             <a:ext cx="7772400" cy="1143000"/>
           </a:xfrm>
           <a:prstGeom prst="roundRect">
@@ -6031,7 +6186,7 @@
         </p:nvSpPr>
         <p:spPr>
           <a:xfrm>
-            <a:off x="914400" y="5394959"/>
+            <a:off x="2231390" y="5586094"/>
             <a:ext cx="7406640" cy="960120"/>
           </a:xfrm>
           <a:prstGeom prst="rect">
@@ -6050,7 +6205,7 @@
               <a:t>🌾  </a:t>
             </a:r>
             <a:r>
-              <a:rPr b="1" sz="1250">
+              <a:rPr sz="1250" b="1">
                 <a:solidFill>
                   <a:srgbClr val="0C2B1B"/>
                 </a:solidFill>
@@ -6065,66 +6220,70 @@
                 </a:solidFill>
                 <a:latin typeface="Source Sans 3"/>
               </a:rPr>
-              <a:t>“AgriWatch Goa bridges AI and agriculture by turning environmental data into early warnings that help farmers act before crop stress becomes crop loss.”</a:t>
-            </a:r>
-          </a:p>
-        </p:txBody>
-      </p:sp>
-      <p:sp>
-        <p:nvSpPr>
-          <p:cNvPr id="14" name="Rounded Rectangle 13"/>
-          <p:cNvSpPr/>
-          <p:nvPr/>
-        </p:nvSpPr>
-        <p:spPr>
-          <a:xfrm>
-            <a:off x="8732520" y="5303520"/>
-            <a:ext cx="2697480" cy="1143000"/>
-          </a:xfrm>
-          <a:prstGeom prst="roundRect">
-            <a:avLst/>
-          </a:prstGeom>
-          <a:solidFill>
-            <a:srgbClr val="103422"/>
-          </a:solidFill>
-          <a:ln w="15240">
-            <a:solidFill>
-              <a:srgbClr val="D97706"/>
-            </a:solidFill>
-          </a:ln>
-        </p:spPr>
-        <p:style>
-          <a:lnRef idx="1">
-            <a:schemeClr val="accent1"/>
-          </a:lnRef>
-          <a:fillRef idx="3">
-            <a:schemeClr val="accent1"/>
-          </a:fillRef>
-          <a:effectRef idx="2">
-            <a:schemeClr val="accent1"/>
-          </a:effectRef>
-          <a:fontRef idx="minor">
-            <a:schemeClr val="lt1"/>
-          </a:fontRef>
-        </p:style>
-        <p:txBody>
-          <a:bodyPr rtlCol="0" anchor="ctr"/>
-          <a:lstStyle/>
-          <a:p>
-            <a:pPr algn="ctr"/>
-          </a:p>
-        </p:txBody>
-      </p:sp>
-      <p:sp>
-        <p:nvSpPr>
-          <p:cNvPr id="15" name="TextBox 14"/>
+              <a:t>“AgriWatch Goa turns environmental data into early warnings — helping farmers act before crop stress becomes crop loss.”</a:t>
+            </a:r>
+            <a:endParaRPr sz="1250">
+              <a:solidFill>
+                <a:srgbClr val="1A2820"/>
+              </a:solidFill>
+              <a:latin typeface="Source Sans 3"/>
+            </a:endParaRPr>
+          </a:p>
+        </p:txBody>
+      </p:sp>
+    </p:spTree>
+  </p:cSld>
+  <p:clrMapOvr>
+    <a:masterClrMapping/>
+  </p:clrMapOvr>
+</p:sld>
+</file>
+
+<file path=ppt/slides/slide13.xml><?xml version="1.0" encoding="utf-8"?>
+<p:sld xmlns:a="http://schemas.openxmlformats.org/drawingml/2006/main" xmlns:r="http://schemas.openxmlformats.org/officeDocument/2006/relationships" xmlns:p="http://schemas.openxmlformats.org/presentationml/2006/main">
+  <p:cSld>
+    <p:spTree>
+      <p:nvGrpSpPr>
+        <p:cNvPr id="1" name=""/>
+        <p:cNvGrpSpPr/>
+        <p:nvPr/>
+      </p:nvGrpSpPr>
+      <p:grpSpPr/>
+      <p:pic>
+        <p:nvPicPr>
+          <p:cNvPr id="2" name="Picture 1" descr="slide1_pic1.png"/>
+          <p:cNvPicPr>
+            <a:picLocks noChangeAspect="1"/>
+          </p:cNvPicPr>
+          <p:nvPr/>
+        </p:nvPicPr>
+        <p:blipFill>
+          <a:blip r:embed="rId1"/>
+          <a:srcRect/>
+          <a:stretch>
+            <a:fillRect/>
+          </a:stretch>
+        </p:blipFill>
+        <p:spPr>
+          <a:xfrm>
+            <a:off x="7434072" y="0"/>
+            <a:ext cx="4754880" cy="6858000"/>
+          </a:xfrm>
+          <a:prstGeom prst="rect">
+            <a:avLst/>
+          </a:prstGeom>
+        </p:spPr>
+      </p:pic>
+      <p:sp>
+        <p:nvSpPr>
+          <p:cNvPr id="3" name="TextBox 2"/>
           <p:cNvSpPr txBox="1"/>
           <p:nvPr/>
         </p:nvSpPr>
         <p:spPr>
           <a:xfrm>
-            <a:off x="8897112" y="5431536"/>
-            <a:ext cx="2368296" cy="886968"/>
+            <a:off x="645795" y="2598420"/>
+            <a:ext cx="6400800" cy="1661795"/>
           </a:xfrm>
           <a:prstGeom prst="rect">
             <a:avLst/>
@@ -6141,65 +6300,64 @@
               <a:spcAft>
                 <a:spcPts val="600"/>
               </a:spcAft>
-              <a:defRPr sz="1400" b="1">
-                <a:solidFill>
-                  <a:srgbClr val="D97706"/>
+              <a:defRPr sz="4400" b="1">
+                <a:solidFill>
+                  <a:srgbClr val="FFFFFF"/>
                 </a:solidFill>
                 <a:latin typeface="Montserrat"/>
               </a:defRPr>
             </a:pPr>
             <a:r>
-              <a:t>🙏 Thank You!</a:t>
-            </a:r>
-          </a:p>
-          <a:p>
-            <a:pPr>
-              <a:spcAft>
-                <a:spcPts val="400"/>
-              </a:spcAft>
-            </a:pPr>
-            <a:r>
-              <a:rPr b="1" sz="1200">
-                <a:solidFill>
-                  <a:srgbClr val="D97706"/>
-                </a:solidFill>
-                <a:latin typeface="Source Sans 3"/>
-              </a:rPr>
-              <a:t>AgriWatch Goa: </a:t>
-            </a:r>
-            <a:r>
-              <a:rPr sz="1200">
-                <a:solidFill>
-                  <a:srgbClr val="FFFFFF"/>
-                </a:solidFill>
-                <a:latin typeface="Source Sans 3"/>
-              </a:rPr>
-              <a:t>Sankalp Setu 2026</a:t>
-            </a:r>
-          </a:p>
-          <a:p>
-            <a:pPr>
-              <a:spcAft>
-                <a:spcPts val="400"/>
-              </a:spcAft>
-            </a:pPr>
-            <a:r>
-              <a:rPr b="1" sz="1200">
-                <a:solidFill>
-                  <a:srgbClr val="D97706"/>
-                </a:solidFill>
-                <a:latin typeface="Source Sans 3"/>
-              </a:rPr>
-              <a:t>Live Demo: </a:t>
-            </a:r>
-            <a:r>
-              <a:rPr sz="1200">
-                <a:solidFill>
-                  <a:srgbClr val="FFFFFF"/>
-                </a:solidFill>
-                <a:latin typeface="Source Sans 3"/>
-              </a:rPr>
-              <a:t>Q&amp;A &amp; Discussion</a:t>
+              <a:rPr>
+                <a:solidFill>
+                  <a:srgbClr val="FF0000"/>
+                </a:solidFill>
+              </a:rPr>
+              <a:t>Thank You!</a:t>
+            </a:r>
+            <a:endParaRPr>
+              <a:solidFill>
+                <a:srgbClr val="FF0000"/>
+              </a:solidFill>
+            </a:endParaRPr>
+          </a:p>
+          <a:p>
+            <a:pPr>
+              <a:spcAft>
+                <a:spcPts val="600"/>
+              </a:spcAft>
+              <a:defRPr sz="1400" b="1">
+                <a:solidFill>
+                  <a:srgbClr val="E2E8F0"/>
+                </a:solidFill>
+                <a:latin typeface="Source Sans 3"/>
+              </a:defRPr>
+            </a:pPr>
+            <a:r>
+              <a:rPr>
+                <a:solidFill>
+                  <a:schemeClr val="tx1"/>
+                </a:solidFill>
+              </a:rPr>
+              <a:t>AgriWatch Goa — AI-Powered Crop Stress Detection &amp; Farm Early-Warning Platform.</a:t>
+            </a:r>
+            <a:endParaRPr>
+              <a:solidFill>
+                <a:schemeClr val="tx1"/>
+              </a:solidFill>
+            </a:endParaRPr>
+          </a:p>
+          <a:p>
+            <a:pPr>
+              <a:defRPr sz="1300">
+                <a:solidFill>
+                  <a:srgbClr val="BACCC0"/>
+                </a:solidFill>
+                <a:latin typeface="Source Sans 3"/>
+              </a:defRPr>
+            </a:pPr>
+            <a:r>
+              <a:t>Predictive intelligence protecting Goa's farmers before stress becomes crop loss.</a:t>
             </a:r>
           </a:p>
         </p:txBody>
@@ -6213,7 +6371,7 @@
 </file>
 
 <file path=ppt/slides/slide2.xml><?xml version="1.0" encoding="utf-8"?>
-<p:sld xmlns:a="http://schemas.openxmlformats.org/drawingml/2006/main" xmlns:p="http://schemas.openxmlformats.org/presentationml/2006/main" xmlns:r="http://schemas.openxmlformats.org/officeDocument/2006/relationships">
+<p:sld xmlns:a="http://schemas.openxmlformats.org/drawingml/2006/main" xmlns:r="http://schemas.openxmlformats.org/officeDocument/2006/relationships" xmlns:p="http://schemas.openxmlformats.org/presentationml/2006/main">
   <p:cSld>
     <p:bg>
       <p:bgPr>
@@ -6230,30 +6388,6 @@
         <p:nvPr/>
       </p:nvGrpSpPr>
       <p:grpSpPr/>
-      <p:pic>
-        <p:nvPicPr>
-          <p:cNvPr id="2" name="Picture 1" descr="slide2_pic1.png"/>
-          <p:cNvPicPr>
-            <a:picLocks noChangeAspect="1"/>
-          </p:cNvPicPr>
-          <p:nvPr/>
-        </p:nvPicPr>
-        <p:blipFill>
-          <a:blip r:embed="rId2"/>
-          <a:stretch>
-            <a:fillRect/>
-          </a:stretch>
-        </p:blipFill>
-        <p:spPr>
-          <a:xfrm>
-            <a:off x="7616952" y="0"/>
-            <a:ext cx="4572000" cy="6858000"/>
-          </a:xfrm>
-          <a:prstGeom prst="rect">
-            <a:avLst/>
-          </a:prstGeom>
-        </p:spPr>
-      </p:pic>
       <p:sp>
         <p:nvSpPr>
           <p:cNvPr id="3" name="TextBox 2"/>
@@ -6321,7 +6455,7 @@
               </a:defRPr>
             </a:pPr>
             <a:r>
-              <a:t>Why traditional visual scouting fails smallholder Goan farmers during monsoons</a:t>
+              <a:t>Why traditional visual scouting fails Goan farmers during extreme monsoon shifts</a:t>
             </a:r>
           </a:p>
         </p:txBody>
@@ -6415,7 +6549,7 @@
               </a:spcAft>
             </a:pPr>
             <a:r>
-              <a:rPr b="1" sz="1200">
+              <a:rPr sz="1200" b="1">
                 <a:solidFill>
                   <a:srgbClr val="0C2B1B"/>
                 </a:solidFill>
@@ -6430,8 +6564,14 @@
                 </a:solidFill>
                 <a:latin typeface="Source Sans 3"/>
               </a:rPr>
-              <a:t>Sudden heavy rain spells saturate coastal and khazan soils, triggering rapid root asphyxiation and waterlogging.</a:t>
-            </a:r>
+              <a:t>Sudden downpours rapidly flood low-lying khazan lands, suffocating root systems.</a:t>
+            </a:r>
+            <a:endParaRPr sz="1200">
+              <a:solidFill>
+                <a:srgbClr val="1A2820"/>
+              </a:solidFill>
+              <a:latin typeface="Source Sans 3"/>
+            </a:endParaRPr>
           </a:p>
         </p:txBody>
       </p:sp>
@@ -6524,13 +6664,13 @@
               </a:spcAft>
             </a:pPr>
             <a:r>
-              <a:rPr b="1" sz="1200">
-                <a:solidFill>
-                  <a:srgbClr val="0C2B1B"/>
-                </a:solidFill>
-                <a:latin typeface="Source Sans 3"/>
-              </a:rPr>
-              <a:t>Laterite Chemistry: </a:t>
+              <a:rPr sz="1200" b="1">
+                <a:solidFill>
+                  <a:srgbClr val="0C2B1B"/>
+                </a:solidFill>
+                <a:latin typeface="Source Sans 3"/>
+              </a:rPr>
+              <a:t>Acidic Soils: </a:t>
             </a:r>
             <a:r>
               <a:rPr sz="1200">
@@ -6539,8 +6679,14 @@
                 </a:solidFill>
                 <a:latin typeface="Source Sans 3"/>
               </a:rPr>
-              <a:t>Goa's naturally acidic soils (pH 4.8–5.8) lock essential micronutrients when moisture fluctuates between extremes.</a:t>
-            </a:r>
+              <a:t>Goa's laterite soil (pH 4.8–5.8) locks key nutrients during extreme wet/dry fluctuations.</a:t>
+            </a:r>
+            <a:endParaRPr sz="1200">
+              <a:solidFill>
+                <a:srgbClr val="1A2820"/>
+              </a:solidFill>
+              <a:latin typeface="Source Sans 3"/>
+            </a:endParaRPr>
           </a:p>
         </p:txBody>
       </p:sp>
@@ -6633,13 +6779,13 @@
               </a:spcAft>
             </a:pPr>
             <a:r>
-              <a:rPr b="1" sz="1200">
-                <a:solidFill>
-                  <a:srgbClr val="0C2B1B"/>
-                </a:solidFill>
-                <a:latin typeface="Source Sans 3"/>
-              </a:rPr>
-              <a:t>The 'Too-Late' Dilemma: </a:t>
+              <a:rPr sz="1200" b="1">
+                <a:solidFill>
+                  <a:srgbClr val="0C2B1B"/>
+                </a:solidFill>
+                <a:latin typeface="Source Sans 3"/>
+              </a:rPr>
+              <a:t>Silent Pathogens: </a:t>
             </a:r>
             <a:r>
               <a:rPr sz="1200">
@@ -6648,8 +6794,14 @@
                 </a:solidFill>
                 <a:latin typeface="Source Sans 3"/>
               </a:rPr>
-              <a:t>Pathologies like Rice Blast and Cashew Dieback multiply invisibly days before physical foliar symptoms appear.</a:t>
-            </a:r>
+              <a:t>Rice Blast &amp; Cashew Dieback multiply days before visible foliar symptoms appear.</a:t>
+            </a:r>
+            <a:endParaRPr sz="1200">
+              <a:solidFill>
+                <a:srgbClr val="1A2820"/>
+              </a:solidFill>
+              <a:latin typeface="Source Sans 3"/>
+            </a:endParaRPr>
           </a:p>
         </p:txBody>
       </p:sp>
@@ -6725,7 +6877,7 @@
               <a:t>💡  </a:t>
             </a:r>
             <a:r>
-              <a:rPr b="1" sz="1250">
+              <a:rPr sz="1250" b="1">
                 <a:solidFill>
                   <a:srgbClr val="0C2B1B"/>
                 </a:solidFill>
@@ -6740,8 +6892,14 @@
                 </a:solidFill>
                 <a:latin typeface="Source Sans 3"/>
               </a:rPr>
-              <a:t>Current agricultural support is largely reactive (compensating post-loss). Farmers need predictive, localized early warnings delivered in time to save crops.</a:t>
-            </a:r>
+              <a:t>Post-loss relief is too late. Farmers need hyper-local early warnings to protect standing crops.</a:t>
+            </a:r>
+            <a:endParaRPr sz="1250">
+              <a:solidFill>
+                <a:srgbClr val="1A2820"/>
+              </a:solidFill>
+              <a:latin typeface="Source Sans 3"/>
+            </a:endParaRPr>
           </a:p>
         </p:txBody>
       </p:sp>
@@ -6754,7 +6912,7 @@
 </file>
 
 <file path=ppt/slides/slide3.xml><?xml version="1.0" encoding="utf-8"?>
-<p:sld xmlns:a="http://schemas.openxmlformats.org/drawingml/2006/main" xmlns:p="http://schemas.openxmlformats.org/presentationml/2006/main" xmlns:r="http://schemas.openxmlformats.org/officeDocument/2006/relationships">
+<p:sld xmlns:a="http://schemas.openxmlformats.org/drawingml/2006/main" xmlns:r="http://schemas.openxmlformats.org/officeDocument/2006/relationships" xmlns:p="http://schemas.openxmlformats.org/presentationml/2006/main">
   <p:cSld>
     <p:bg>
       <p:bgPr>
@@ -6838,7 +6996,7 @@
               </a:defRPr>
             </a:pPr>
             <a:r>
-              <a:t>Fusing meteorological telemetry, soil parameters, and AI inference into farmer advisories</a:t>
+              <a:t>Fusing weather telemetry, soil health, and ML models into actionable farmer alerts</a:t>
             </a:r>
           </a:p>
         </p:txBody>
@@ -6852,7 +7010,7 @@
           <p:nvPr/>
         </p:nvPicPr>
         <p:blipFill>
-          <a:blip r:embed="rId2"/>
+          <a:blip r:embed="rId1"/>
           <a:stretch>
             <a:fillRect/>
           </a:stretch>
@@ -6884,7 +7042,7 @@
           <a:noFill/>
         </p:spPr>
         <p:txBody>
-          <a:bodyPr wrap="square" lIns="27432" rIns="27432" tIns="27432" bIns="27432">
+          <a:bodyPr wrap="square" lIns="27432" tIns="27432" rIns="27432" bIns="27432">
             <a:spAutoFit/>
           </a:bodyPr>
           <a:lstStyle/>
@@ -6900,6 +7058,12 @@
               <a:t>Predictive
 Advisory Flow</a:t>
             </a:r>
+            <a:endParaRPr sz="1000" b="1">
+              <a:solidFill>
+                <a:srgbClr val="FFFFFF"/>
+              </a:solidFill>
+              <a:latin typeface="Montserrat"/>
+            </a:endParaRPr>
           </a:p>
         </p:txBody>
       </p:sp>
@@ -6920,7 +7084,7 @@
           <a:noFill/>
         </p:spPr>
         <p:txBody>
-          <a:bodyPr wrap="square" lIns="27432" rIns="27432" tIns="27432" bIns="27432">
+          <a:bodyPr wrap="square" lIns="27432" tIns="27432" rIns="27432" bIns="27432">
             <a:spAutoFit/>
           </a:bodyPr>
           <a:lstStyle/>
@@ -6935,6 +7099,12 @@
               </a:rPr>
               <a:t>Weather Data</a:t>
             </a:r>
+            <a:endParaRPr sz="950" b="1">
+              <a:solidFill>
+                <a:srgbClr val="FFFFFF"/>
+              </a:solidFill>
+              <a:latin typeface="Montserrat"/>
+            </a:endParaRPr>
           </a:p>
           <a:p>
             <a:pPr algn="ctr">
@@ -6951,6 +7121,12 @@
               </a:rPr>
               <a:t>Real-time forecasts &amp; trends</a:t>
             </a:r>
+            <a:endParaRPr sz="800">
+              <a:solidFill>
+                <a:srgbClr val="F0F8F2"/>
+              </a:solidFill>
+              <a:latin typeface="Source Sans 3"/>
+            </a:endParaRPr>
           </a:p>
         </p:txBody>
       </p:sp>
@@ -6971,7 +7147,7 @@
           <a:noFill/>
         </p:spPr>
         <p:txBody>
-          <a:bodyPr wrap="square" lIns="27432" rIns="27432" tIns="27432" bIns="27432">
+          <a:bodyPr wrap="square" lIns="27432" tIns="27432" rIns="27432" bIns="27432">
             <a:spAutoFit/>
           </a:bodyPr>
           <a:lstStyle/>
@@ -6986,6 +7162,12 @@
               </a:rPr>
               <a:t>Farmer Advisory</a:t>
             </a:r>
+            <a:endParaRPr sz="950" b="1">
+              <a:solidFill>
+                <a:srgbClr val="FFFFFF"/>
+              </a:solidFill>
+              <a:latin typeface="Montserrat"/>
+            </a:endParaRPr>
           </a:p>
           <a:p>
             <a:pPr algn="ctr">
@@ -7002,6 +7184,12 @@
               </a:rPr>
               <a:t>Actionable recommendations</a:t>
             </a:r>
+            <a:endParaRPr sz="800">
+              <a:solidFill>
+                <a:srgbClr val="F0F8F2"/>
+              </a:solidFill>
+              <a:latin typeface="Source Sans 3"/>
+            </a:endParaRPr>
           </a:p>
         </p:txBody>
       </p:sp>
@@ -7022,7 +7210,7 @@
           <a:noFill/>
         </p:spPr>
         <p:txBody>
-          <a:bodyPr wrap="square" lIns="27432" rIns="27432" tIns="27432" bIns="27432">
+          <a:bodyPr wrap="square" lIns="27432" tIns="27432" rIns="27432" bIns="27432">
             <a:spAutoFit/>
           </a:bodyPr>
           <a:lstStyle/>
@@ -7037,6 +7225,12 @@
               </a:rPr>
               <a:t>Early Warning</a:t>
             </a:r>
+            <a:endParaRPr sz="950" b="1">
+              <a:solidFill>
+                <a:srgbClr val="FFFFFF"/>
+              </a:solidFill>
+              <a:latin typeface="Montserrat"/>
+            </a:endParaRPr>
           </a:p>
           <a:p>
             <a:pPr algn="ctr">
@@ -7053,6 +7247,12 @@
               </a:rPr>
               <a:t>Timely alerts on threats</a:t>
             </a:r>
+            <a:endParaRPr sz="800">
+              <a:solidFill>
+                <a:srgbClr val="F0F8F2"/>
+              </a:solidFill>
+              <a:latin typeface="Source Sans 3"/>
+            </a:endParaRPr>
           </a:p>
         </p:txBody>
       </p:sp>
@@ -7073,7 +7273,7 @@
           <a:noFill/>
         </p:spPr>
         <p:txBody>
-          <a:bodyPr wrap="square" lIns="27432" rIns="27432" tIns="27432" bIns="27432">
+          <a:bodyPr wrap="square" lIns="27432" tIns="27432" rIns="27432" bIns="27432">
             <a:spAutoFit/>
           </a:bodyPr>
           <a:lstStyle/>
@@ -7088,6 +7288,12 @@
               </a:rPr>
               <a:t>Soil &amp; Agro-Climatic</a:t>
             </a:r>
+            <a:endParaRPr sz="900" b="1">
+              <a:solidFill>
+                <a:srgbClr val="FFFFFF"/>
+              </a:solidFill>
+              <a:latin typeface="Montserrat"/>
+            </a:endParaRPr>
           </a:p>
           <a:p>
             <a:pPr algn="ctr">
@@ -7104,6 +7310,12 @@
               </a:rPr>
               <a:t>Soil moisture &amp; microclimate</a:t>
             </a:r>
+            <a:endParaRPr sz="750">
+              <a:solidFill>
+                <a:srgbClr val="F0F8F2"/>
+              </a:solidFill>
+              <a:latin typeface="Source Sans 3"/>
+            </a:endParaRPr>
           </a:p>
         </p:txBody>
       </p:sp>
@@ -7124,7 +7336,7 @@
           <a:noFill/>
         </p:spPr>
         <p:txBody>
-          <a:bodyPr wrap="square" lIns="27432" rIns="27432" tIns="27432" bIns="27432">
+          <a:bodyPr wrap="square" lIns="27432" tIns="27432" rIns="27432" bIns="27432">
             <a:spAutoFit/>
           </a:bodyPr>
           <a:lstStyle/>
@@ -7139,6 +7351,12 @@
               </a:rPr>
               <a:t>Leaf Analysis</a:t>
             </a:r>
+            <a:endParaRPr sz="950" b="1">
+              <a:solidFill>
+                <a:srgbClr val="FFFFFF"/>
+              </a:solidFill>
+              <a:latin typeface="Montserrat"/>
+            </a:endParaRPr>
           </a:p>
           <a:p>
             <a:pPr algn="ctr">
@@ -7155,6 +7373,12 @@
               </a:rPr>
               <a:t>Visual foliar diagnostics</a:t>
             </a:r>
+            <a:endParaRPr sz="800">
+              <a:solidFill>
+                <a:srgbClr val="F0F8F2"/>
+              </a:solidFill>
+              <a:latin typeface="Source Sans 3"/>
+            </a:endParaRPr>
           </a:p>
         </p:txBody>
       </p:sp>
@@ -7175,7 +7399,7 @@
           <a:noFill/>
         </p:spPr>
         <p:txBody>
-          <a:bodyPr wrap="square" lIns="27432" rIns="27432" tIns="27432" bIns="27432">
+          <a:bodyPr wrap="square" lIns="27432" tIns="27432" rIns="27432" bIns="27432">
             <a:spAutoFit/>
           </a:bodyPr>
           <a:lstStyle/>
@@ -7190,6 +7414,12 @@
               </a:rPr>
               <a:t>Machine Learning</a:t>
             </a:r>
+            <a:endParaRPr sz="950" b="1">
+              <a:solidFill>
+                <a:srgbClr val="FFFFFF"/>
+              </a:solidFill>
+              <a:latin typeface="Montserrat"/>
+            </a:endParaRPr>
           </a:p>
           <a:p>
             <a:pPr algn="ctr">
@@ -7206,6 +7436,12 @@
               </a:rPr>
               <a:t>Pattern detection &amp; risk</a:t>
             </a:r>
+            <a:endParaRPr sz="800">
+              <a:solidFill>
+                <a:srgbClr val="F0F8F2"/>
+              </a:solidFill>
+              <a:latin typeface="Source Sans 3"/>
+            </a:endParaRPr>
           </a:p>
         </p:txBody>
       </p:sp>
@@ -7298,7 +7534,7 @@
               </a:spcAft>
             </a:pPr>
             <a:r>
-              <a:rPr b="1" sz="1200">
+              <a:rPr sz="1200" b="1">
                 <a:solidFill>
                   <a:srgbClr val="0C2B1B"/>
                 </a:solidFill>
@@ -7313,8 +7549,14 @@
                 </a:solidFill>
                 <a:latin typeface="Source Sans 3"/>
               </a:rPr>
-              <a:t>Hyper-localized GIS mapping from Tiswadi to Canacona.</a:t>
-            </a:r>
+              <a:t>Hyper-local GIS surveillance across all 12 Goan talukas.</a:t>
+            </a:r>
+            <a:endParaRPr sz="1200">
+              <a:solidFill>
+                <a:srgbClr val="1A2820"/>
+              </a:solidFill>
+              <a:latin typeface="Source Sans 3"/>
+            </a:endParaRPr>
           </a:p>
         </p:txBody>
       </p:sp>
@@ -7407,7 +7649,7 @@
               </a:spcAft>
             </a:pPr>
             <a:r>
-              <a:rPr b="1" sz="1200">
+              <a:rPr sz="1200" b="1">
                 <a:solidFill>
                   <a:srgbClr val="0C2B1B"/>
                 </a:solidFill>
@@ -7422,8 +7664,14 @@
                 </a:solidFill>
                 <a:latin typeface="Source Sans 3"/>
               </a:rPr>
-              <a:t>Evaluates Drought, Waterlog, Pest, Disease &amp; Heat.</a:t>
-            </a:r>
+              <a:t>Simultaneously predicts drought, flooding, pests, disease &amp; heat stress.</a:t>
+            </a:r>
+            <a:endParaRPr sz="1200">
+              <a:solidFill>
+                <a:srgbClr val="1A2820"/>
+              </a:solidFill>
+              <a:latin typeface="Source Sans 3"/>
+            </a:endParaRPr>
           </a:p>
         </p:txBody>
       </p:sp>
@@ -7516,7 +7764,7 @@
               </a:spcAft>
             </a:pPr>
             <a:r>
-              <a:rPr b="1" sz="1200">
+              <a:rPr sz="1200" b="1">
                 <a:solidFill>
                   <a:srgbClr val="0C2B1B"/>
                 </a:solidFill>
@@ -7531,8 +7779,14 @@
                 </a:solidFill>
                 <a:latin typeface="Source Sans 3"/>
               </a:rPr>
-              <a:t>Extracts colorimetry &amp; necrotic lesion biomarkers.</a:t>
-            </a:r>
+              <a:t>Extracts foliar HSV colorimetry and necrotic lesion ratios.</a:t>
+            </a:r>
+            <a:endParaRPr sz="1200">
+              <a:solidFill>
+                <a:srgbClr val="1A2820"/>
+              </a:solidFill>
+              <a:latin typeface="Source Sans 3"/>
+            </a:endParaRPr>
           </a:p>
         </p:txBody>
       </p:sp>
@@ -7625,7 +7879,7 @@
               </a:spcAft>
             </a:pPr>
             <a:r>
-              <a:rPr b="1" sz="1200">
+              <a:rPr sz="1200" b="1">
                 <a:solidFill>
                   <a:srgbClr val="0C2B1B"/>
                 </a:solidFill>
@@ -7640,8 +7894,14 @@
                 </a:solidFill>
                 <a:latin typeface="Source Sans 3"/>
               </a:rPr>
-              <a:t>Decomposes Gini feature drivers for every alert.</a:t>
-            </a:r>
+              <a:t>Exposes exact Gini feature drivers and radar profiles for every alert.</a:t>
+            </a:r>
+            <a:endParaRPr sz="1200">
+              <a:solidFill>
+                <a:srgbClr val="1A2820"/>
+              </a:solidFill>
+              <a:latin typeface="Source Sans 3"/>
+            </a:endParaRPr>
           </a:p>
         </p:txBody>
       </p:sp>
@@ -7734,7 +7994,7 @@
               </a:spcAft>
             </a:pPr>
             <a:r>
-              <a:rPr b="1" sz="1200">
+              <a:rPr sz="1200" b="1">
                 <a:solidFill>
                   <a:srgbClr val="0C2B1B"/>
                 </a:solidFill>
@@ -7749,8 +8009,14 @@
                 </a:solidFill>
                 <a:latin typeface="Source Sans 3"/>
               </a:rPr>
-              <a:t>Native Konkani (देवनागरी), Hindi, and English.</a:t>
-            </a:r>
+              <a:t>Available in Konkani (देवनागरी), Hindi, and English.</a:t>
+            </a:r>
+            <a:endParaRPr sz="1200">
+              <a:solidFill>
+                <a:srgbClr val="1A2820"/>
+              </a:solidFill>
+              <a:latin typeface="Source Sans 3"/>
+            </a:endParaRPr>
           </a:p>
         </p:txBody>
       </p:sp>
@@ -7843,7 +8109,7 @@
               </a:spcAft>
             </a:pPr>
             <a:r>
-              <a:rPr b="1" sz="1200">
+              <a:rPr sz="1200" b="1">
                 <a:solidFill>
                   <a:srgbClr val="0C2B1B"/>
                 </a:solidFill>
@@ -7858,8 +8124,14 @@
                 </a:solidFill>
                 <a:latin typeface="Source Sans 3"/>
               </a:rPr>
-              <a:t>Accessible on basic feature phones and WhatsApp.</a:t>
-            </a:r>
+              <a:t>Reaches basic phones via 2G SMS and village WhatsApp groups.</a:t>
+            </a:r>
+            <a:endParaRPr sz="1200">
+              <a:solidFill>
+                <a:srgbClr val="1A2820"/>
+              </a:solidFill>
+              <a:latin typeface="Source Sans 3"/>
+            </a:endParaRPr>
           </a:p>
         </p:txBody>
       </p:sp>
@@ -7935,7 +8207,7 @@
               <a:t>🌾  </a:t>
             </a:r>
             <a:r>
-              <a:rPr b="1" sz="1250">
+              <a:rPr sz="1250" b="1">
                 <a:solidFill>
                   <a:srgbClr val="0C2B1B"/>
                 </a:solidFill>
@@ -7950,8 +8222,14 @@
                 </a:solidFill>
                 <a:latin typeface="Source Sans 3"/>
               </a:rPr>
-              <a:t>Integrated Pipeline: Telemetry Ingestion ➔ Machine Learning Inference ➔ XAI Verification ➔ Actionable Farmer Advisory</a:t>
-            </a:r>
+              <a:t>Integrated Flow: Telemetry Ingestion ➔ ML Inference ➔ XAI Validation ➔ Farmer Advisory</a:t>
+            </a:r>
+            <a:endParaRPr sz="1250">
+              <a:solidFill>
+                <a:srgbClr val="1A2820"/>
+              </a:solidFill>
+              <a:latin typeface="Source Sans 3"/>
+            </a:endParaRPr>
           </a:p>
         </p:txBody>
       </p:sp>
@@ -7964,7 +8242,7 @@
 </file>
 
 <file path=ppt/slides/slide4.xml><?xml version="1.0" encoding="utf-8"?>
-<p:sld xmlns:a="http://schemas.openxmlformats.org/drawingml/2006/main" xmlns:p="http://schemas.openxmlformats.org/presentationml/2006/main" xmlns:r="http://schemas.openxmlformats.org/officeDocument/2006/relationships">
+<p:sld xmlns:a="http://schemas.openxmlformats.org/drawingml/2006/main" xmlns:r="http://schemas.openxmlformats.org/officeDocument/2006/relationships" xmlns:p="http://schemas.openxmlformats.org/presentationml/2006/main">
   <p:cSld>
     <p:bg>
       <p:bgPr>
@@ -8048,7 +8326,7 @@
               </a:defRPr>
             </a:pPr>
             <a:r>
-              <a:t>A modular, low-overhead pipeline from satellite telemetry ingestion to village-level delivery</a:t>
+              <a:t>A lightweight pipeline connecting satellite data to village-level farmer delivery</a:t>
             </a:r>
           </a:p>
         </p:txBody>
@@ -8062,7 +8340,7 @@
           <p:nvPr/>
         </p:nvPicPr>
         <p:blipFill>
-          <a:blip r:embed="rId2"/>
+          <a:blip r:embed="rId1"/>
           <a:stretch>
             <a:fillRect/>
           </a:stretch>
@@ -8166,13 +8444,13 @@
               </a:spcAft>
             </a:pPr>
             <a:r>
-              <a:rPr b="1" sz="1200">
-                <a:solidFill>
-                  <a:srgbClr val="0C2B1B"/>
-                </a:solidFill>
-                <a:latin typeface="Source Sans 3"/>
-              </a:rPr>
-              <a:t>Python 3.14 &amp; Scikit-learn: </a:t>
+              <a:rPr sz="1200" b="1">
+                <a:solidFill>
+                  <a:srgbClr val="0C2B1B"/>
+                </a:solidFill>
+                <a:latin typeface="Source Sans 3"/>
+              </a:rPr>
+              <a:t>Core Engine: </a:t>
             </a:r>
             <a:r>
               <a:rPr sz="1200">
@@ -8181,8 +8459,14 @@
                 </a:solidFill>
                 <a:latin typeface="Source Sans 3"/>
               </a:rPr>
-              <a:t>Ensemble algorithms &amp; data pipes.</a:t>
-            </a:r>
+              <a:t>Python 3.14 &amp; Scikit-learn Random Forest ensemble pipeline.</a:t>
+            </a:r>
+            <a:endParaRPr sz="1200">
+              <a:solidFill>
+                <a:srgbClr val="1A2820"/>
+              </a:solidFill>
+              <a:latin typeface="Source Sans 3"/>
+            </a:endParaRPr>
           </a:p>
           <a:p>
             <a:pPr>
@@ -8191,13 +8475,13 @@
               </a:spcAft>
             </a:pPr>
             <a:r>
-              <a:rPr b="1" sz="1200">
-                <a:solidFill>
-                  <a:srgbClr val="0C2B1B"/>
-                </a:solidFill>
-                <a:latin typeface="Source Sans 3"/>
-              </a:rPr>
-              <a:t>Random Forest Models: </a:t>
+              <a:rPr sz="1200" b="1">
+                <a:solidFill>
+                  <a:srgbClr val="0C2B1B"/>
+                </a:solidFill>
+                <a:latin typeface="Source Sans 3"/>
+              </a:rPr>
+              <a:t>Models: </a:t>
             </a:r>
             <a:r>
               <a:rPr sz="1200">
@@ -8206,8 +8490,14 @@
                 </a:solidFill>
                 <a:latin typeface="Source Sans 3"/>
               </a:rPr>
-              <a:t>Primary stress classifier + 6 sub-models.</a:t>
-            </a:r>
+              <a:t>1 composite stress classifier + 6 specialized hazard sub-models.</a:t>
+            </a:r>
+            <a:endParaRPr sz="1200">
+              <a:solidFill>
+                <a:srgbClr val="1A2820"/>
+              </a:solidFill>
+              <a:latin typeface="Source Sans 3"/>
+            </a:endParaRPr>
           </a:p>
           <a:p>
             <a:pPr>
@@ -8216,13 +8506,13 @@
               </a:spcAft>
             </a:pPr>
             <a:r>
-              <a:rPr b="1" sz="1200">
-                <a:solidFill>
-                  <a:srgbClr val="0C2B1B"/>
-                </a:solidFill>
-                <a:latin typeface="Source Sans 3"/>
-              </a:rPr>
-              <a:t>StandardScaler &amp; One-Hot: </a:t>
+              <a:rPr sz="1200" b="1">
+                <a:solidFill>
+                  <a:srgbClr val="0C2B1B"/>
+                </a:solidFill>
+                <a:latin typeface="Source Sans 3"/>
+              </a:rPr>
+              <a:t>Preprocessing: </a:t>
             </a:r>
             <a:r>
               <a:rPr sz="1200">
@@ -8231,8 +8521,14 @@
                 </a:solidFill>
                 <a:latin typeface="Source Sans 3"/>
               </a:rPr>
-              <a:t>Normalized environmental telemetry.</a:t>
-            </a:r>
+              <a:t>StandardScaler &amp; One-Hot pipelines for rapid telemetry normalization.</a:t>
+            </a:r>
+            <a:endParaRPr sz="1200">
+              <a:solidFill>
+                <a:srgbClr val="1A2820"/>
+              </a:solidFill>
+              <a:latin typeface="Source Sans 3"/>
+            </a:endParaRPr>
           </a:p>
         </p:txBody>
       </p:sp>
@@ -8325,13 +8621,13 @@
               </a:spcAft>
             </a:pPr>
             <a:r>
-              <a:rPr b="1" sz="1200">
-                <a:solidFill>
-                  <a:srgbClr val="0C2B1B"/>
-                </a:solidFill>
-                <a:latin typeface="Source Sans 3"/>
-              </a:rPr>
-              <a:t>Streamlit Web Framework: </a:t>
+              <a:rPr sz="1200" b="1">
+                <a:solidFill>
+                  <a:srgbClr val="0C2B1B"/>
+                </a:solidFill>
+                <a:latin typeface="Source Sans 3"/>
+              </a:rPr>
+              <a:t>Dashboard UI: </a:t>
             </a:r>
             <a:r>
               <a:rPr sz="1200">
@@ -8340,8 +8636,14 @@
                 </a:solidFill>
                 <a:latin typeface="Source Sans 3"/>
               </a:rPr>
-              <a:t>Fast, reactive glassmorphic UI.</a:t>
-            </a:r>
+              <a:t>Reactive Streamlit web console with real-time controls.</a:t>
+            </a:r>
+            <a:endParaRPr sz="1200">
+              <a:solidFill>
+                <a:srgbClr val="1A2820"/>
+              </a:solidFill>
+              <a:latin typeface="Source Sans 3"/>
+            </a:endParaRPr>
           </a:p>
           <a:p>
             <a:pPr>
@@ -8350,13 +8652,13 @@
               </a:spcAft>
             </a:pPr>
             <a:r>
-              <a:rPr b="1" sz="1200">
-                <a:solidFill>
-                  <a:srgbClr val="0C2B1B"/>
-                </a:solidFill>
-                <a:latin typeface="Source Sans 3"/>
-              </a:rPr>
-              <a:t>Folium GIS Mapping: </a:t>
+              <a:rPr sz="1200" b="1">
+                <a:solidFill>
+                  <a:srgbClr val="0C2B1B"/>
+                </a:solidFill>
+                <a:latin typeface="Source Sans 3"/>
+              </a:rPr>
+              <a:t>GIS Mapping: </a:t>
             </a:r>
             <a:r>
               <a:rPr sz="1200">
@@ -8365,8 +8667,14 @@
                 </a:solidFill>
                 <a:latin typeface="Source Sans 3"/>
               </a:rPr>
-              <a:t>Geospatial color-coded taluka markers.</a:t>
-            </a:r>
+              <a:t>Folium taluka risk markers with satellite canopy overlays.</a:t>
+            </a:r>
+            <a:endParaRPr sz="1200">
+              <a:solidFill>
+                <a:srgbClr val="1A2820"/>
+              </a:solidFill>
+              <a:latin typeface="Source Sans 3"/>
+            </a:endParaRPr>
           </a:p>
           <a:p>
             <a:pPr>
@@ -8375,13 +8683,13 @@
               </a:spcAft>
             </a:pPr>
             <a:r>
-              <a:rPr b="1" sz="1200">
-                <a:solidFill>
-                  <a:srgbClr val="0C2B1B"/>
-                </a:solidFill>
-                <a:latin typeface="Source Sans 3"/>
-              </a:rPr>
-              <a:t>Plotly Interactive Charts: </a:t>
+              <a:rPr sz="1200" b="1">
+                <a:solidFill>
+                  <a:srgbClr val="0C2B1B"/>
+                </a:solidFill>
+                <a:latin typeface="Source Sans 3"/>
+              </a:rPr>
+              <a:t>Analytics: </a:t>
             </a:r>
             <a:r>
               <a:rPr sz="1200">
@@ -8390,8 +8698,14 @@
                 </a:solidFill>
                 <a:latin typeface="Source Sans 3"/>
               </a:rPr>
-              <a:t>Radar risk plots &amp; XAI bar graphs.</a:t>
-            </a:r>
+              <a:t>Plotly 6-axis risk radars and XAI feature-importance charts.</a:t>
+            </a:r>
+            <a:endParaRPr sz="1200">
+              <a:solidFill>
+                <a:srgbClr val="1A2820"/>
+              </a:solidFill>
+              <a:latin typeface="Source Sans 3"/>
+            </a:endParaRPr>
           </a:p>
         </p:txBody>
       </p:sp>
@@ -8484,13 +8798,13 @@
               </a:spcAft>
             </a:pPr>
             <a:r>
-              <a:rPr b="1" sz="1200">
-                <a:solidFill>
-                  <a:srgbClr val="0C2B1B"/>
-                </a:solidFill>
-                <a:latin typeface="Source Sans 3"/>
-              </a:rPr>
-              <a:t>OpenWeatherMap Live API: </a:t>
+              <a:rPr sz="1200" b="1">
+                <a:solidFill>
+                  <a:srgbClr val="0C2B1B"/>
+                </a:solidFill>
+                <a:latin typeface="Source Sans 3"/>
+              </a:rPr>
+              <a:t>Live Telemetry: </a:t>
             </a:r>
             <a:r>
               <a:rPr sz="1200">
@@ -8499,8 +8813,14 @@
                 </a:solidFill>
                 <a:latin typeface="Source Sans 3"/>
               </a:rPr>
-              <a:t>Deterministic Goan simulation modes.</a:t>
-            </a:r>
+              <a:t>OpenWeatherMap API with custom Goan microclimate simulation.</a:t>
+            </a:r>
+            <a:endParaRPr sz="1200">
+              <a:solidFill>
+                <a:srgbClr val="1A2820"/>
+              </a:solidFill>
+              <a:latin typeface="Source Sans 3"/>
+            </a:endParaRPr>
           </a:p>
           <a:p>
             <a:pPr>
@@ -8509,13 +8829,13 @@
               </a:spcAft>
             </a:pPr>
             <a:r>
-              <a:rPr b="1" sz="1200">
-                <a:solidFill>
-                  <a:srgbClr val="0C2B1B"/>
-                </a:solidFill>
-                <a:latin typeface="Source Sans 3"/>
-              </a:rPr>
-              <a:t>NumPy &amp; PIL Colorimetry: </a:t>
+              <a:rPr sz="1200" b="1">
+                <a:solidFill>
+                  <a:srgbClr val="0C2B1B"/>
+                </a:solidFill>
+                <a:latin typeface="Source Sans 3"/>
+              </a:rPr>
+              <a:t>Vision Module: </a:t>
             </a:r>
             <a:r>
               <a:rPr sz="1200">
@@ -8524,8 +8844,14 @@
                 </a:solidFill>
                 <a:latin typeface="Source Sans 3"/>
               </a:rPr>
-              <a:t>Foliar lesion segmentation.</a:t>
-            </a:r>
+              <a:t>NumPy &amp; PIL colorimetric segmentation for necrotic leaf spots.</a:t>
+            </a:r>
+            <a:endParaRPr sz="1200">
+              <a:solidFill>
+                <a:srgbClr val="1A2820"/>
+              </a:solidFill>
+              <a:latin typeface="Source Sans 3"/>
+            </a:endParaRPr>
           </a:p>
           <a:p>
             <a:pPr>
@@ -8534,13 +8860,13 @@
               </a:spcAft>
             </a:pPr>
             <a:r>
-              <a:rPr b="1" sz="1200">
-                <a:solidFill>
-                  <a:srgbClr val="0C2B1B"/>
-                </a:solidFill>
-                <a:latin typeface="Source Sans 3"/>
-              </a:rPr>
-              <a:t>Twilio SMS &amp; WhatsApp: </a:t>
+              <a:rPr sz="1200" b="1">
+                <a:solidFill>
+                  <a:srgbClr val="0C2B1B"/>
+                </a:solidFill>
+                <a:latin typeface="Source Sans 3"/>
+              </a:rPr>
+              <a:t>Farmer Dispatch: </a:t>
             </a:r>
             <a:r>
               <a:rPr sz="1200">
@@ -8549,8 +8875,14 @@
                 </a:solidFill>
                 <a:latin typeface="Source Sans 3"/>
               </a:rPr>
-              <a:t>Direct 2G farmer advisory delivery.</a:t>
-            </a:r>
+              <a:t>Twilio SMS gateway + WhatsApp community broadcast links.</a:t>
+            </a:r>
+            <a:endParaRPr sz="1200">
+              <a:solidFill>
+                <a:srgbClr val="1A2820"/>
+              </a:solidFill>
+              <a:latin typeface="Source Sans 3"/>
+            </a:endParaRPr>
           </a:p>
         </p:txBody>
       </p:sp>
@@ -8563,7 +8895,7 @@
 </file>
 
 <file path=ppt/slides/slide5.xml><?xml version="1.0" encoding="utf-8"?>
-<p:sld xmlns:a="http://schemas.openxmlformats.org/drawingml/2006/main" xmlns:p="http://schemas.openxmlformats.org/presentationml/2006/main" xmlns:r="http://schemas.openxmlformats.org/officeDocument/2006/relationships">
+<p:sld xmlns:a="http://schemas.openxmlformats.org/drawingml/2006/main" xmlns:r="http://schemas.openxmlformats.org/officeDocument/2006/relationships" xmlns:p="http://schemas.openxmlformats.org/presentationml/2006/main">
   <p:cSld>
     <p:bg>
       <p:bgPr>
@@ -8647,7 +8979,7 @@
               </a:defRPr>
             </a:pPr>
             <a:r>
-              <a:t>State-wide agro-climatic surveillance dashboard for Directorate of Agriculture &amp; ZAO officers</a:t>
+              <a:t>State-wide agro-climatic surveillance for Directorate of Agriculture &amp; ZAO officers</a:t>
             </a:r>
           </a:p>
         </p:txBody>
@@ -8741,13 +9073,13 @@
               </a:spcAft>
             </a:pPr>
             <a:r>
-              <a:rPr b="1" sz="1200">
-                <a:solidFill>
-                  <a:srgbClr val="0C2B1B"/>
-                </a:solidFill>
-                <a:latin typeface="Source Sans 3"/>
-              </a:rPr>
-              <a:t>Complete Goa Coverage: </a:t>
+              <a:rPr sz="1200" b="1">
+                <a:solidFill>
+                  <a:srgbClr val="0C2B1B"/>
+                </a:solidFill>
+                <a:latin typeface="Source Sans 3"/>
+              </a:rPr>
+              <a:t>Complete Coverage: </a:t>
             </a:r>
             <a:r>
               <a:rPr sz="1200">
@@ -8756,8 +9088,14 @@
                 </a:solidFill>
                 <a:latin typeface="Source Sans 3"/>
               </a:rPr>
-              <a:t>Covers all North and South Goa talukas from Pernem to Canacona with pre-configured agro-climatic zones.</a:t>
-            </a:r>
+              <a:t>Surveillance across all 12 North &amp; South Goa talukas.</a:t>
+            </a:r>
+            <a:endParaRPr sz="1200">
+              <a:solidFill>
+                <a:srgbClr val="1A2820"/>
+              </a:solidFill>
+              <a:latin typeface="Source Sans 3"/>
+            </a:endParaRPr>
           </a:p>
         </p:txBody>
       </p:sp>
@@ -8850,13 +9188,13 @@
               </a:spcAft>
             </a:pPr>
             <a:r>
-              <a:rPr b="1" sz="1200">
-                <a:solidFill>
-                  <a:srgbClr val="0C2B1B"/>
-                </a:solidFill>
-                <a:latin typeface="Source Sans 3"/>
-              </a:rPr>
-              <a:t>Dual-Layer Mapping: </a:t>
+              <a:rPr sz="1200" b="1">
+                <a:solidFill>
+                  <a:srgbClr val="0C2B1B"/>
+                </a:solidFill>
+                <a:latin typeface="Source Sans 3"/>
+              </a:rPr>
+              <a:t>Dual-Layer GIS: </a:t>
             </a:r>
             <a:r>
               <a:rPr sz="1200">
@@ -8865,8 +9203,14 @@
                 </a:solidFill>
                 <a:latin typeface="Source Sans 3"/>
               </a:rPr>
-              <a:t>Folium geospatial views with standard terrain maps and satellite crop canopy layers.</a:t>
-            </a:r>
+              <a:t>Folium map toggles between base terrain and satellite canopy.</a:t>
+            </a:r>
+            <a:endParaRPr sz="1200">
+              <a:solidFill>
+                <a:srgbClr val="1A2820"/>
+              </a:solidFill>
+              <a:latin typeface="Source Sans 3"/>
+            </a:endParaRPr>
           </a:p>
         </p:txBody>
       </p:sp>
@@ -8959,13 +9303,13 @@
               </a:spcAft>
             </a:pPr>
             <a:r>
-              <a:rPr b="1" sz="1200">
-                <a:solidFill>
-                  <a:srgbClr val="0C2B1B"/>
-                </a:solidFill>
-                <a:latin typeface="Source Sans 3"/>
-              </a:rPr>
-              <a:t>Intuitive Status Tiers: </a:t>
+              <a:rPr sz="1200" b="1">
+                <a:solidFill>
+                  <a:srgbClr val="0C2B1B"/>
+                </a:solidFill>
+                <a:latin typeface="Source Sans 3"/>
+              </a:rPr>
+              <a:t>Risk Tiers: </a:t>
             </a:r>
             <a:r>
               <a:rPr sz="1200">
@@ -8974,8 +9318,14 @@
                 </a:solidFill>
                 <a:latin typeface="Source Sans 3"/>
               </a:rPr>
-              <a:t>Green (Normal), CadetBlue (Watch), Orange (Alert), and Red (Critical Intervention Required).</a:t>
-            </a:r>
+              <a:t>Green (Normal), Blue (Watch), Orange (Alert), Red (Critical).</a:t>
+            </a:r>
+            <a:endParaRPr sz="1200">
+              <a:solidFill>
+                <a:srgbClr val="1A2820"/>
+              </a:solidFill>
+              <a:latin typeface="Source Sans 3"/>
+            </a:endParaRPr>
           </a:p>
         </p:txBody>
       </p:sp>
@@ -9068,13 +9418,13 @@
               </a:spcAft>
             </a:pPr>
             <a:r>
-              <a:rPr b="1" sz="1200">
-                <a:solidFill>
-                  <a:srgbClr val="0C2B1B"/>
-                </a:solidFill>
-                <a:latin typeface="Source Sans 3"/>
-              </a:rPr>
-              <a:t>14 Parameters Evaluated: </a:t>
+              <a:rPr sz="1200" b="1">
+                <a:solidFill>
+                  <a:srgbClr val="0C2B1B"/>
+                </a:solidFill>
+                <a:latin typeface="Source Sans 3"/>
+              </a:rPr>
+              <a:t>14 Parameters: </a:t>
             </a:r>
             <a:r>
               <a:rPr sz="1200">
@@ -9083,8 +9433,14 @@
                 </a:solidFill>
                 <a:latin typeface="Source Sans 3"/>
               </a:rPr>
-              <a:t>Temperature, relative humidity, 24h rainfall, dry/wet streaks, soil moisture, and soil pH.</a:t>
-            </a:r>
+              <a:t>Tracks temp, humidity, 24h rain, wet/dry streaks, soil moisture, and pH.</a:t>
+            </a:r>
+            <a:endParaRPr sz="1200">
+              <a:solidFill>
+                <a:srgbClr val="1A2820"/>
+              </a:solidFill>
+              <a:latin typeface="Source Sans 3"/>
+            </a:endParaRPr>
           </a:p>
         </p:txBody>
       </p:sp>
@@ -9177,13 +9533,13 @@
               </a:spcAft>
             </a:pPr>
             <a:r>
-              <a:rPr b="1" sz="1200">
-                <a:solidFill>
-                  <a:srgbClr val="0C2B1B"/>
-                </a:solidFill>
-                <a:latin typeface="Source Sans 3"/>
-              </a:rPr>
-              <a:t>One-Click Drilldown: </a:t>
+              <a:rPr sz="1200" b="1">
+                <a:solidFill>
+                  <a:srgbClr val="0C2B1B"/>
+                </a:solidFill>
+                <a:latin typeface="Source Sans 3"/>
+              </a:rPr>
+              <a:t>Quick Drilldown: </a:t>
             </a:r>
             <a:r>
               <a:rPr sz="1200">
@@ -9192,8 +9548,14 @@
                 </a:solidFill>
                 <a:latin typeface="Source Sans 3"/>
               </a:rPr>
-              <a:t>Instant summary cards displaying primary crops, ambient temp, soil pH, and immediate ICAR action plan.</a:t>
-            </a:r>
+              <a:t>Summary cards display taluka crop types, metrics, and ICAR advisories.</a:t>
+            </a:r>
+            <a:endParaRPr sz="1200">
+              <a:solidFill>
+                <a:srgbClr val="1A2820"/>
+              </a:solidFill>
+              <a:latin typeface="Source Sans 3"/>
+            </a:endParaRPr>
           </a:p>
         </p:txBody>
       </p:sp>
@@ -9286,13 +9648,13 @@
               </a:spcAft>
             </a:pPr>
             <a:r>
-              <a:rPr b="1" sz="1200">
-                <a:solidFill>
-                  <a:srgbClr val="0C2B1B"/>
-                </a:solidFill>
-                <a:latin typeface="Source Sans 3"/>
-              </a:rPr>
-              <a:t>Zero Language Barriers: </a:t>
+              <a:rPr sz="1200" b="1">
+                <a:solidFill>
+                  <a:srgbClr val="0C2B1B"/>
+                </a:solidFill>
+                <a:latin typeface="Source Sans 3"/>
+              </a:rPr>
+              <a:t>Trilingual Toggle: </a:t>
             </a:r>
             <a:r>
               <a:rPr sz="1200">
@@ -9301,8 +9663,14 @@
                 </a:solidFill>
                 <a:latin typeface="Source Sans 3"/>
               </a:rPr>
-              <a:t>Instant toggle between English, Konkani (गोंयची राजभास in Devanagari), and Hindi.</a:t>
-            </a:r>
+              <a:t>Instant 1-click switch between English, Konkani (गोंयची राजभास), and Hindi.</a:t>
+            </a:r>
+            <a:endParaRPr sz="1200">
+              <a:solidFill>
+                <a:srgbClr val="1A2820"/>
+              </a:solidFill>
+              <a:latin typeface="Source Sans 3"/>
+            </a:endParaRPr>
           </a:p>
         </p:txBody>
       </p:sp>
@@ -9378,7 +9746,7 @@
               <a:t>📊  </a:t>
             </a:r>
             <a:r>
-              <a:rPr b="1" sz="1250">
+              <a:rPr sz="1250" b="1">
                 <a:solidFill>
                   <a:srgbClr val="0C2B1B"/>
                 </a:solidFill>
@@ -9393,8 +9761,14 @@
                 </a:solidFill>
                 <a:latin typeface="Source Sans 3"/>
               </a:rPr>
-              <a:t>Agriculture directors and ZAO officers can survey the entire state's agricultural risk at a glance and dispatch targeted alerts from a single centralized dashboard.</a:t>
-            </a:r>
+              <a:t>Statewide farm risk is visible at a glance, enabling instant targeted advisories from one central console.</a:t>
+            </a:r>
+            <a:endParaRPr sz="1250">
+              <a:solidFill>
+                <a:srgbClr val="1A2820"/>
+              </a:solidFill>
+              <a:latin typeface="Source Sans 3"/>
+            </a:endParaRPr>
           </a:p>
         </p:txBody>
       </p:sp>
@@ -9407,7 +9781,7 @@
 </file>
 
 <file path=ppt/slides/slide6.xml><?xml version="1.0" encoding="utf-8"?>
-<p:sld xmlns:a="http://schemas.openxmlformats.org/drawingml/2006/main" xmlns:p="http://schemas.openxmlformats.org/presentationml/2006/main" xmlns:r="http://schemas.openxmlformats.org/officeDocument/2006/relationships">
+<p:sld xmlns:a="http://schemas.openxmlformats.org/drawingml/2006/main" xmlns:r="http://schemas.openxmlformats.org/officeDocument/2006/relationships" xmlns:p="http://schemas.openxmlformats.org/presentationml/2006/main">
   <p:cSld>
     <p:bg>
       <p:bgPr>
@@ -9491,7 +9865,7 @@
               </a:defRPr>
             </a:pPr>
             <a:r>
-              <a:t>A prototype printable agro-meteorological advisory card bridging digital intelligence to the field</a:t>
+              <a:t>A printable agro-meteorological advisory card bridging digital intelligence to the field</a:t>
             </a:r>
           </a:p>
         </p:txBody>
@@ -9585,13 +9959,13 @@
               </a:spcAft>
             </a:pPr>
             <a:r>
-              <a:rPr b="1" sz="1200">
-                <a:solidFill>
-                  <a:srgbClr val="0C2B1B"/>
-                </a:solidFill>
-                <a:latin typeface="Source Sans 3"/>
-              </a:rPr>
-              <a:t>👤 Farmer &amp; Land Profile: </a:t>
+              <a:rPr sz="1200" b="1">
+                <a:solidFill>
+                  <a:srgbClr val="0C2B1B"/>
+                </a:solidFill>
+                <a:latin typeface="Source Sans 3"/>
+              </a:rPr>
+              <a:t>👤 Farmer &amp; Land: </a:t>
             </a:r>
             <a:r>
               <a:rPr sz="1200">
@@ -9600,8 +9974,14 @@
                 </a:solidFill>
                 <a:latin typeface="Source Sans 3"/>
               </a:rPr>
-              <a:t>Records farmer name, taluka, survey/parcel number, and Goan land types (Khazan, Morod, Keri).</a:t>
-            </a:r>
+              <a:t>Farmer name, taluka, parcel number, and soil type (Khazan, Morod, Keri).</a:t>
+            </a:r>
+            <a:endParaRPr sz="1200">
+              <a:solidFill>
+                <a:srgbClr val="1A2820"/>
+              </a:solidFill>
+              <a:latin typeface="Source Sans 3"/>
+            </a:endParaRPr>
           </a:p>
           <a:p>
             <a:pPr>
@@ -9610,13 +9990,13 @@
               </a:spcAft>
             </a:pPr>
             <a:r>
-              <a:rPr b="1" sz="1200">
-                <a:solidFill>
-                  <a:srgbClr val="0C2B1B"/>
-                </a:solidFill>
-                <a:latin typeface="Source Sans 3"/>
-              </a:rPr>
-              <a:t>🌦️ Meteorological Telemetry: </a:t>
+              <a:rPr sz="1200" b="1">
+                <a:solidFill>
+                  <a:srgbClr val="0C2B1B"/>
+                </a:solidFill>
+                <a:latin typeface="Source Sans 3"/>
+              </a:rPr>
+              <a:t>🌦️ Weather Signals: </a:t>
             </a:r>
             <a:r>
               <a:rPr sz="1200">
@@ -9625,8 +10005,14 @@
                 </a:solidFill>
                 <a:latin typeface="Source Sans 3"/>
               </a:rPr>
-              <a:t>Timestamped 24h rainfall, ambient temp, relative humidity, and consecutive wet/dry days.</a:t>
-            </a:r>
+              <a:t>24h rainfall, ambient temp, relative humidity, and wet/dry streaks.</a:t>
+            </a:r>
+            <a:endParaRPr sz="1200">
+              <a:solidFill>
+                <a:srgbClr val="1A2820"/>
+              </a:solidFill>
+              <a:latin typeface="Source Sans 3"/>
+            </a:endParaRPr>
           </a:p>
           <a:p>
             <a:pPr>
@@ -9635,13 +10021,13 @@
               </a:spcAft>
             </a:pPr>
             <a:r>
-              <a:rPr b="1" sz="1200">
-                <a:solidFill>
-                  <a:srgbClr val="0C2B1B"/>
-                </a:solidFill>
-                <a:latin typeface="Source Sans 3"/>
-              </a:rPr>
-              <a:t>🌱 Soil Health Telemetry: </a:t>
+              <a:rPr sz="1200" b="1">
+                <a:solidFill>
+                  <a:srgbClr val="0C2B1B"/>
+                </a:solidFill>
+                <a:latin typeface="Source Sans 3"/>
+              </a:rPr>
+              <a:t>🌱 Soil Telemetry: </a:t>
             </a:r>
             <a:r>
               <a:rPr sz="1200">
@@ -9650,8 +10036,14 @@
                 </a:solidFill>
                 <a:latin typeface="Source Sans 3"/>
               </a:rPr>
-              <a:t>Goa laterite soil pH level (acidic loam) and root zone soil moisture percentage.</a:t>
-            </a:r>
+              <a:t>Root-zone soil moisture % and laterite soil pH level.</a:t>
+            </a:r>
+            <a:endParaRPr sz="1200">
+              <a:solidFill>
+                <a:srgbClr val="1A2820"/>
+              </a:solidFill>
+              <a:latin typeface="Source Sans 3"/>
+            </a:endParaRPr>
           </a:p>
           <a:p>
             <a:pPr>
@@ -9660,13 +10052,13 @@
               </a:spcAft>
             </a:pPr>
             <a:r>
-              <a:rPr b="1" sz="1200">
-                <a:solidFill>
-                  <a:srgbClr val="0C2B1B"/>
-                </a:solidFill>
-                <a:latin typeface="Source Sans 3"/>
-              </a:rPr>
-              <a:t>🤖 AI Agro-Stress Grading: </a:t>
+              <a:rPr sz="1200" b="1">
+                <a:solidFill>
+                  <a:srgbClr val="0C2B1B"/>
+                </a:solidFill>
+                <a:latin typeface="Source Sans 3"/>
+              </a:rPr>
+              <a:t>🤖 AI Stress Grading: </a:t>
             </a:r>
             <a:r>
               <a:rPr sz="1200">
@@ -9675,8 +10067,14 @@
                 </a:solidFill>
                 <a:latin typeface="Source Sans 3"/>
               </a:rPr>
-              <a:t>Composite stress rating (Grade A to D) with active hazard classification.</a:t>
-            </a:r>
+              <a:t>Composite stress index (Grade A to D) with active hazard tags.</a:t>
+            </a:r>
+            <a:endParaRPr sz="1200">
+              <a:solidFill>
+                <a:srgbClr val="1A2820"/>
+              </a:solidFill>
+              <a:latin typeface="Source Sans 3"/>
+            </a:endParaRPr>
           </a:p>
           <a:p>
             <a:pPr>
@@ -9685,13 +10083,13 @@
               </a:spcAft>
             </a:pPr>
             <a:r>
-              <a:rPr b="1" sz="1200">
-                <a:solidFill>
-                  <a:srgbClr val="0C2B1B"/>
-                </a:solidFill>
-                <a:latin typeface="Source Sans 3"/>
-              </a:rPr>
-              <a:t>🌿 ICAR-CCARI Prescriptions: </a:t>
+              <a:rPr sz="1200" b="1">
+                <a:solidFill>
+                  <a:srgbClr val="0C2B1B"/>
+                </a:solidFill>
+                <a:latin typeface="Source Sans 3"/>
+              </a:rPr>
+              <a:t>🌿 ICAR Protocols: </a:t>
             </a:r>
             <a:r>
               <a:rPr sz="1200">
@@ -9700,8 +10098,14 @@
                 </a:solidFill>
                 <a:latin typeface="Source Sans 3"/>
               </a:rPr>
-              <a:t>Scientifically verified remediation protocol rendered in English and native Konkani.</a:t>
-            </a:r>
+              <a:t>Remediation guidance presented in native Konkani and English.</a:t>
+            </a:r>
+            <a:endParaRPr sz="1200">
+              <a:solidFill>
+                <a:srgbClr val="1A2820"/>
+              </a:solidFill>
+              <a:latin typeface="Source Sans 3"/>
+            </a:endParaRPr>
           </a:p>
           <a:p>
             <a:pPr>
@@ -9710,13 +10114,13 @@
               </a:spcAft>
             </a:pPr>
             <a:r>
-              <a:rPr b="1" sz="1200">
-                <a:solidFill>
-                  <a:srgbClr val="0C2B1B"/>
-                </a:solidFill>
-                <a:latin typeface="Source Sans 3"/>
-              </a:rPr>
-              <a:t>🔲 Verification ID &amp; QR Concept: </a:t>
+              <a:rPr sz="1200" b="1">
+                <a:solidFill>
+                  <a:srgbClr val="0C2B1B"/>
+                </a:solidFill>
+                <a:latin typeface="Source Sans 3"/>
+              </a:rPr>
+              <a:t>🔲 Verification QR: </a:t>
             </a:r>
             <a:r>
               <a:rPr sz="1200">
@@ -9725,8 +10129,14 @@
                 </a:solidFill>
                 <a:latin typeface="Source Sans 3"/>
               </a:rPr>
-              <a:t>Unique tracking serial (e.g. GOA-KISAN-2026-PON-4819) with tamper-resistant verification hash.</a:t>
-            </a:r>
+              <a:t>Unique tracking serial ID with tamper-proof cryptographic hash.</a:t>
+            </a:r>
+            <a:endParaRPr sz="1200">
+              <a:solidFill>
+                <a:srgbClr val="1A2820"/>
+              </a:solidFill>
+              <a:latin typeface="Source Sans 3"/>
+            </a:endParaRPr>
           </a:p>
         </p:txBody>
       </p:sp>
@@ -9819,13 +10229,13 @@
               </a:spcAft>
             </a:pPr>
             <a:r>
-              <a:rPr b="1" sz="1200">
-                <a:solidFill>
-                  <a:srgbClr val="0C2B1B"/>
-                </a:solidFill>
-                <a:latin typeface="Source Sans 3"/>
-              </a:rPr>
-              <a:t>Govt Header: </a:t>
+              <a:rPr sz="1200" b="1">
+                <a:solidFill>
+                  <a:srgbClr val="0C2B1B"/>
+                </a:solidFill>
+                <a:latin typeface="Source Sans 3"/>
+              </a:rPr>
+              <a:t>Authority: </a:t>
             </a:r>
             <a:r>
               <a:rPr sz="1200">
@@ -9834,8 +10244,14 @@
                 </a:solidFill>
                 <a:latin typeface="Source Sans 3"/>
               </a:rPr>
-              <a:t>Government of Goa • Directorate of Agriculture</a:t>
-            </a:r>
+              <a:t>Directorate of Agriculture &amp; ICAR-CCARI Old Goa</a:t>
+            </a:r>
+            <a:endParaRPr sz="1200">
+              <a:solidFill>
+                <a:srgbClr val="1A2820"/>
+              </a:solidFill>
+              <a:latin typeface="Source Sans 3"/>
+            </a:endParaRPr>
           </a:p>
           <a:p>
             <a:pPr>
@@ -9844,13 +10260,13 @@
               </a:spcAft>
             </a:pPr>
             <a:r>
-              <a:rPr b="1" sz="1200">
-                <a:solidFill>
-                  <a:srgbClr val="0C2B1B"/>
-                </a:solidFill>
-                <a:latin typeface="Source Sans 3"/>
-              </a:rPr>
-              <a:t>Advisory Authority: </a:t>
+              <a:rPr sz="1200" b="1">
+                <a:solidFill>
+                  <a:srgbClr val="0C2B1B"/>
+                </a:solidFill>
+                <a:latin typeface="Source Sans 3"/>
+              </a:rPr>
+              <a:t>Sample Record: </a:t>
             </a:r>
             <a:r>
               <a:rPr sz="1200">
@@ -9859,8 +10275,14 @@
                 </a:solidFill>
                 <a:latin typeface="Source Sans 3"/>
               </a:rPr>
-              <a:t>In Technical Guidance with ICAR-CCARI, Old Goa</a:t>
-            </a:r>
+              <a:t>Ramesh Naik | Ponda (South Goa) | Parcel S-412/3</a:t>
+            </a:r>
+            <a:endParaRPr sz="1200">
+              <a:solidFill>
+                <a:srgbClr val="1A2820"/>
+              </a:solidFill>
+              <a:latin typeface="Source Sans 3"/>
+            </a:endParaRPr>
           </a:p>
           <a:p>
             <a:pPr>
@@ -9869,13 +10291,13 @@
               </a:spcAft>
             </a:pPr>
             <a:r>
-              <a:rPr b="1" sz="1200">
-                <a:solidFill>
-                  <a:srgbClr val="0C2B1B"/>
-                </a:solidFill>
-                <a:latin typeface="Source Sans 3"/>
-              </a:rPr>
-              <a:t>Sample Record: </a:t>
+              <a:rPr sz="1200" b="1">
+                <a:solidFill>
+                  <a:srgbClr val="0C2B1B"/>
+                </a:solidFill>
+                <a:latin typeface="Source Sans 3"/>
+              </a:rPr>
+              <a:t>Assessment: </a:t>
             </a:r>
             <a:r>
               <a:rPr sz="1200">
@@ -9884,8 +10306,14 @@
                 </a:solidFill>
                 <a:latin typeface="Source Sans 3"/>
               </a:rPr>
-              <a:t>Ramesh Naik | Ponda (South Goa) | Parcel: S-412/3</a:t>
-            </a:r>
+              <a:t>Rice (Paddy) — Tillering Stage | Laterite pH 5.2</a:t>
+            </a:r>
+            <a:endParaRPr sz="1200">
+              <a:solidFill>
+                <a:srgbClr val="1A2820"/>
+              </a:solidFill>
+              <a:latin typeface="Source Sans 3"/>
+            </a:endParaRPr>
           </a:p>
           <a:p>
             <a:pPr>
@@ -9894,13 +10322,13 @@
               </a:spcAft>
             </a:pPr>
             <a:r>
-              <a:rPr b="1" sz="1200">
-                <a:solidFill>
-                  <a:srgbClr val="0C2B1B"/>
-                </a:solidFill>
-                <a:latin typeface="Source Sans 3"/>
-              </a:rPr>
-              <a:t>Current Assessment: </a:t>
+              <a:rPr sz="1200" b="1">
+                <a:solidFill>
+                  <a:srgbClr val="0C2B1B"/>
+                </a:solidFill>
+                <a:latin typeface="Source Sans 3"/>
+              </a:rPr>
+              <a:t>AI Classification: </a:t>
             </a:r>
             <a:r>
               <a:rPr sz="1200">
@@ -9909,8 +10337,14 @@
                 </a:solidFill>
                 <a:latin typeface="Source Sans 3"/>
               </a:rPr>
-              <a:t>Rice (Paddy) — Tillering Stage | Laterite Soil pH: 5.2</a:t>
-            </a:r>
+              <a:t>🟡 GRADE B (WATCH) • Stress Index: 38.4%</a:t>
+            </a:r>
+            <a:endParaRPr sz="1200">
+              <a:solidFill>
+                <a:srgbClr val="1A2820"/>
+              </a:solidFill>
+              <a:latin typeface="Source Sans 3"/>
+            </a:endParaRPr>
           </a:p>
           <a:p>
             <a:pPr>
@@ -9919,13 +10353,13 @@
               </a:spcAft>
             </a:pPr>
             <a:r>
-              <a:rPr b="1" sz="1200">
-                <a:solidFill>
-                  <a:srgbClr val="0C2B1B"/>
-                </a:solidFill>
-                <a:latin typeface="Source Sans 3"/>
-              </a:rPr>
-              <a:t>AI Classification: </a:t>
+              <a:rPr sz="1200" b="1">
+                <a:solidFill>
+                  <a:srgbClr val="0C2B1B"/>
+                </a:solidFill>
+                <a:latin typeface="Source Sans 3"/>
+              </a:rPr>
+              <a:t>Prescribed Action: </a:t>
             </a:r>
             <a:r>
               <a:rPr sz="1200">
@@ -9934,8 +10368,14 @@
                 </a:solidFill>
                 <a:latin typeface="Source Sans 3"/>
               </a:rPr>
-              <a:t>🟡 GRADE B (WATCH) • Stress Index: 38.4%</a:t>
-            </a:r>
+              <a:t>Adopt Alternate Wetting &amp; Drying (AWD) water management.</a:t>
+            </a:r>
+            <a:endParaRPr sz="1200">
+              <a:solidFill>
+                <a:srgbClr val="1A2820"/>
+              </a:solidFill>
+              <a:latin typeface="Source Sans 3"/>
+            </a:endParaRPr>
           </a:p>
           <a:p>
             <a:pPr>
@@ -9944,13 +10384,13 @@
               </a:spcAft>
             </a:pPr>
             <a:r>
-              <a:rPr b="1" sz="1200">
-                <a:solidFill>
-                  <a:srgbClr val="0C2B1B"/>
-                </a:solidFill>
-                <a:latin typeface="Source Sans 3"/>
-              </a:rPr>
-              <a:t>Prescribed Advisory: </a:t>
+              <a:rPr sz="1200" b="1">
+                <a:solidFill>
+                  <a:srgbClr val="0C2B1B"/>
+                </a:solidFill>
+                <a:latin typeface="Source Sans 3"/>
+              </a:rPr>
+              <a:t>Verification QR: </a:t>
             </a:r>
             <a:r>
               <a:rPr sz="1200">
@@ -9959,8 +10399,14 @@
                 </a:solidFill>
                 <a:latin typeface="Source Sans 3"/>
               </a:rPr>
-              <a:t>Adopt Alternate Wetting &amp; Drying (AWD) water-saving.</a:t>
-            </a:r>
+              <a:t>[ 🔲 QR VERIFICATION ] • HASH: 48192026</a:t>
+            </a:r>
+            <a:endParaRPr sz="1200">
+              <a:solidFill>
+                <a:srgbClr val="1A2820"/>
+              </a:solidFill>
+              <a:latin typeface="Source Sans 3"/>
+            </a:endParaRPr>
           </a:p>
           <a:p>
             <a:pPr>
@@ -9969,7 +10415,7 @@
               </a:spcAft>
             </a:pPr>
             <a:r>
-              <a:rPr b="1" sz="1200">
+              <a:rPr sz="1200" b="1">
                 <a:solidFill>
                   <a:srgbClr val="0C2B1B"/>
                 </a:solidFill>
@@ -9986,6 +10432,12 @@
               </a:rPr>
               <a:t>[ 🔲 QR VERIFICATION ] • HASH: 48192026</a:t>
             </a:r>
+            <a:endParaRPr sz="1200">
+              <a:solidFill>
+                <a:srgbClr val="1A2820"/>
+              </a:solidFill>
+              <a:latin typeface="Source Sans 3"/>
+            </a:endParaRPr>
           </a:p>
         </p:txBody>
       </p:sp>
@@ -10061,7 +10513,7 @@
               <a:t>🏛️  </a:t>
             </a:r>
             <a:r>
-              <a:rPr b="1" sz="1250">
+              <a:rPr sz="1250" b="1">
                 <a:solidFill>
                   <a:srgbClr val="0C2B1B"/>
                 </a:solidFill>
@@ -10076,8 +10528,14 @@
                 </a:solidFill>
                 <a:latin typeface="Source Sans 3"/>
               </a:rPr>
-              <a:t>Prototype concept designed for future government integration: can be printed at 190+ Village Panchayat e-Gram kiosks to support PMFBY crop insurance claims and ZAO subsidy verification.</a:t>
-            </a:r>
+              <a:t>Deployable via 190+ Village Panchayat e-Gram kiosks to support PMFBY crop insurance claims and subsidy audits.</a:t>
+            </a:r>
+            <a:endParaRPr sz="1250">
+              <a:solidFill>
+                <a:srgbClr val="1A2820"/>
+              </a:solidFill>
+              <a:latin typeface="Source Sans 3"/>
+            </a:endParaRPr>
           </a:p>
         </p:txBody>
       </p:sp>
@@ -10090,7 +10548,7 @@
 </file>
 
 <file path=ppt/slides/slide7.xml><?xml version="1.0" encoding="utf-8"?>
-<p:sld xmlns:a="http://schemas.openxmlformats.org/drawingml/2006/main" xmlns:p="http://schemas.openxmlformats.org/presentationml/2006/main" xmlns:r="http://schemas.openxmlformats.org/officeDocument/2006/relationships">
+<p:sld xmlns:a="http://schemas.openxmlformats.org/drawingml/2006/main" xmlns:r="http://schemas.openxmlformats.org/officeDocument/2006/relationships" xmlns:p="http://schemas.openxmlformats.org/presentationml/2006/main">
   <p:cSld>
     <p:bg>
       <p:bgPr>
@@ -10188,7 +10646,7 @@
           <p:nvPr/>
         </p:nvPicPr>
         <p:blipFill>
-          <a:blip r:embed="rId2"/>
+          <a:blip r:embed="rId1"/>
           <a:stretch>
             <a:fillRect/>
           </a:stretch>
@@ -10220,7 +10678,7 @@
           <a:noFill/>
         </p:spPr>
         <p:txBody>
-          <a:bodyPr wrap="square" lIns="27432" rIns="27432" tIns="27432" bIns="27432">
+          <a:bodyPr wrap="square" lIns="27432" tIns="27432" rIns="27432" bIns="27432">
             <a:spAutoFit/>
           </a:bodyPr>
           <a:lstStyle/>
@@ -10236,6 +10694,12 @@
               <a:t>Random Forest
 Model</a:t>
             </a:r>
+            <a:endParaRPr sz="1050" b="1">
+              <a:solidFill>
+                <a:srgbClr val="FFFFFF"/>
+              </a:solidFill>
+              <a:latin typeface="Montserrat"/>
+            </a:endParaRPr>
           </a:p>
         </p:txBody>
       </p:sp>
@@ -10256,7 +10720,7 @@
           <a:noFill/>
         </p:spPr>
         <p:txBody>
-          <a:bodyPr wrap="square" lIns="27432" rIns="27432" tIns="27432" bIns="27432">
+          <a:bodyPr wrap="square" lIns="27432" tIns="27432" rIns="27432" bIns="27432">
             <a:spAutoFit/>
           </a:bodyPr>
           <a:lstStyle/>
@@ -10271,6 +10735,12 @@
               </a:rPr>
               <a:t>Hazard Predictions</a:t>
             </a:r>
+            <a:endParaRPr sz="1000" b="1">
+              <a:solidFill>
+                <a:srgbClr val="FFFFFF"/>
+              </a:solidFill>
+              <a:latin typeface="Montserrat"/>
+            </a:endParaRPr>
           </a:p>
           <a:p>
             <a:pPr algn="ctr">
@@ -10287,6 +10757,12 @@
               </a:rPr>
               <a:t>7 risks + composite stress</a:t>
             </a:r>
+            <a:endParaRPr sz="850">
+              <a:solidFill>
+                <a:srgbClr val="F0F8F2"/>
+              </a:solidFill>
+              <a:latin typeface="Source Sans 3"/>
+            </a:endParaRPr>
           </a:p>
         </p:txBody>
       </p:sp>
@@ -10307,7 +10783,7 @@
           <a:noFill/>
         </p:spPr>
         <p:txBody>
-          <a:bodyPr wrap="square" lIns="27432" rIns="27432" tIns="27432" bIns="27432">
+          <a:bodyPr wrap="square" lIns="27432" tIns="27432" rIns="27432" bIns="27432">
             <a:spAutoFit/>
           </a:bodyPr>
           <a:lstStyle/>
@@ -10322,6 +10798,12 @@
               </a:rPr>
               <a:t>Weather Features</a:t>
             </a:r>
+            <a:endParaRPr sz="1000" b="1">
+              <a:solidFill>
+                <a:srgbClr val="FFFFFF"/>
+              </a:solidFill>
+              <a:latin typeface="Montserrat"/>
+            </a:endParaRPr>
           </a:p>
           <a:p>
             <a:pPr algn="ctr">
@@ -10338,6 +10820,12 @@
               </a:rPr>
               <a:t>Temperature, rain, humidity</a:t>
             </a:r>
+            <a:endParaRPr sz="850">
+              <a:solidFill>
+                <a:srgbClr val="F0F8F2"/>
+              </a:solidFill>
+              <a:latin typeface="Source Sans 3"/>
+            </a:endParaRPr>
           </a:p>
         </p:txBody>
       </p:sp>
@@ -10358,7 +10846,7 @@
           <a:noFill/>
         </p:spPr>
         <p:txBody>
-          <a:bodyPr wrap="square" lIns="27432" rIns="27432" tIns="27432" bIns="27432">
+          <a:bodyPr wrap="square" lIns="27432" tIns="27432" rIns="27432" bIns="27432">
             <a:spAutoFit/>
           </a:bodyPr>
           <a:lstStyle/>
@@ -10373,6 +10861,12 @@
               </a:rPr>
               <a:t>Crop Features</a:t>
             </a:r>
+            <a:endParaRPr sz="1000" b="1">
+              <a:solidFill>
+                <a:srgbClr val="FFFFFF"/>
+              </a:solidFill>
+              <a:latin typeface="Montserrat"/>
+            </a:endParaRPr>
           </a:p>
           <a:p>
             <a:pPr algn="ctr">
@@ -10389,6 +10883,12 @@
               </a:rPr>
               <a:t>Growth stage, variety, health</a:t>
             </a:r>
+            <a:endParaRPr sz="850">
+              <a:solidFill>
+                <a:srgbClr val="F0F8F2"/>
+              </a:solidFill>
+              <a:latin typeface="Source Sans 3"/>
+            </a:endParaRPr>
           </a:p>
         </p:txBody>
       </p:sp>
@@ -10409,7 +10909,7 @@
           <a:noFill/>
         </p:spPr>
         <p:txBody>
-          <a:bodyPr wrap="square" lIns="27432" rIns="27432" tIns="27432" bIns="27432">
+          <a:bodyPr wrap="square" lIns="27432" tIns="27432" rIns="27432" bIns="27432">
             <a:spAutoFit/>
           </a:bodyPr>
           <a:lstStyle/>
@@ -10424,6 +10924,12 @@
               </a:rPr>
               <a:t>Soil Features</a:t>
             </a:r>
+            <a:endParaRPr sz="1000" b="1">
+              <a:solidFill>
+                <a:srgbClr val="FFFFFF"/>
+              </a:solidFill>
+              <a:latin typeface="Montserrat"/>
+            </a:endParaRPr>
           </a:p>
           <a:p>
             <a:pPr algn="ctr">
@@ -10440,6 +10946,12 @@
               </a:rPr>
               <a:t>Moisture, pH, texture</a:t>
             </a:r>
+            <a:endParaRPr sz="850">
+              <a:solidFill>
+                <a:srgbClr val="F0F8F2"/>
+              </a:solidFill>
+              <a:latin typeface="Source Sans 3"/>
+            </a:endParaRPr>
           </a:p>
         </p:txBody>
       </p:sp>
@@ -10515,7 +11027,7 @@
               <a:t>🧠  </a:t>
             </a:r>
             <a:r>
-              <a:rPr b="1" sz="1250">
+              <a:rPr sz="1250" b="1">
                 <a:solidFill>
                   <a:srgbClr val="0C2B1B"/>
                 </a:solidFill>
@@ -10530,8 +11042,14 @@
                 </a:solidFill>
                 <a:latin typeface="Source Sans 3"/>
               </a:rPr>
-              <a:t>1 Primary Classifier + 6 Binary Hazard Sub-Models evaluate non-linear multi-stress interactions across Goa in under 0.05 seconds.</a:t>
-            </a:r>
+              <a:t>1 primary classifier + 6 binary hazard sub-models evaluate Goa's multi-stress factors in &lt;0.05 seconds.</a:t>
+            </a:r>
+            <a:endParaRPr sz="1250">
+              <a:solidFill>
+                <a:srgbClr val="1A2820"/>
+              </a:solidFill>
+              <a:latin typeface="Source Sans 3"/>
+            </a:endParaRPr>
           </a:p>
         </p:txBody>
       </p:sp>
@@ -10624,13 +11142,13 @@
               </a:spcAft>
             </a:pPr>
             <a:r>
-              <a:rPr b="1" sz="1200">
-                <a:solidFill>
-                  <a:srgbClr val="0C2B1B"/>
-                </a:solidFill>
-                <a:latin typeface="Source Sans 3"/>
-              </a:rPr>
-              <a:t>Multi-Target Design: </a:t>
+              <a:rPr sz="1200" b="1">
+                <a:solidFill>
+                  <a:srgbClr val="0C2B1B"/>
+                </a:solidFill>
+                <a:latin typeface="Source Sans 3"/>
+              </a:rPr>
+              <a:t>Model Ensemble: </a:t>
             </a:r>
             <a:r>
               <a:rPr sz="1200">
@@ -10639,8 +11157,14 @@
                 </a:solidFill>
                 <a:latin typeface="Source Sans 3"/>
               </a:rPr>
-              <a:t>1 Primary Classifier (Overall Stress) + 6 specialized Binary Hazard Sub-Models (Drought, Waterlog, Pest, Disease, Heat, Soil pH).</a:t>
-            </a:r>
+              <a:t>1 primary stress classifier + 6 binary hazard models (Drought, Waterlog, Pest, Disease, Heat, Soil pH).</a:t>
+            </a:r>
+            <a:endParaRPr sz="1200">
+              <a:solidFill>
+                <a:srgbClr val="1A2820"/>
+              </a:solidFill>
+              <a:latin typeface="Source Sans 3"/>
+            </a:endParaRPr>
           </a:p>
           <a:p>
             <a:pPr>
@@ -10649,13 +11173,13 @@
               </a:spcAft>
             </a:pPr>
             <a:r>
-              <a:rPr b="1" sz="1200">
-                <a:solidFill>
-                  <a:srgbClr val="0C2B1B"/>
-                </a:solidFill>
-                <a:latin typeface="Source Sans 3"/>
-              </a:rPr>
-              <a:t>Non-Linear Synthesis: </a:t>
+              <a:rPr sz="1200" b="1">
+                <a:solidFill>
+                  <a:srgbClr val="0C2B1B"/>
+                </a:solidFill>
+                <a:latin typeface="Source Sans 3"/>
+              </a:rPr>
+              <a:t>Microclimates: </a:t>
             </a:r>
             <a:r>
               <a:rPr sz="1200">
@@ -10664,8 +11188,14 @@
                 </a:solidFill>
                 <a:latin typeface="Source Sans 3"/>
               </a:rPr>
-              <a:t>Evaluates complex interactions (e.g. 50mm rain in low-lying Salcete causing blast vs. 80mm in sloped Sattari).</a:t>
-            </a:r>
+              <a:t>Models topography (e.g. 50mm rain in coastal Salcete vs. 80mm in sloped Sattari).</a:t>
+            </a:r>
+            <a:endParaRPr sz="1200">
+              <a:solidFill>
+                <a:srgbClr val="1A2820"/>
+              </a:solidFill>
+              <a:latin typeface="Source Sans 3"/>
+            </a:endParaRPr>
           </a:p>
           <a:p>
             <a:pPr>
@@ -10674,13 +11204,13 @@
               </a:spcAft>
             </a:pPr>
             <a:r>
-              <a:rPr b="1" sz="1200">
-                <a:solidFill>
-                  <a:srgbClr val="0C2B1B"/>
-                </a:solidFill>
-                <a:latin typeface="Source Sans 3"/>
-              </a:rPr>
-              <a:t>Engineered for Speed: </a:t>
+              <a:rPr sz="1200" b="1">
+                <a:solidFill>
+                  <a:srgbClr val="0C2B1B"/>
+                </a:solidFill>
+                <a:latin typeface="Source Sans 3"/>
+              </a:rPr>
+              <a:t>Speed: </a:t>
             </a:r>
             <a:r>
               <a:rPr sz="1200">
@@ -10689,8 +11219,14 @@
                 </a:solidFill>
                 <a:latin typeface="Source Sans 3"/>
               </a:rPr>
-              <a:t>Configured with n_jobs=1 for ultra-fast, in-process single-record inference under 0.05 seconds.</a:t>
-            </a:r>
+              <a:t>Engineered for single-record in-memory inference in under 0.05 seconds.</a:t>
+            </a:r>
+            <a:endParaRPr sz="1200">
+              <a:solidFill>
+                <a:srgbClr val="1A2820"/>
+              </a:solidFill>
+              <a:latin typeface="Source Sans 3"/>
+            </a:endParaRPr>
           </a:p>
         </p:txBody>
       </p:sp>
@@ -10783,13 +11319,13 @@
               </a:spcAft>
             </a:pPr>
             <a:r>
-              <a:rPr b="1" sz="1200">
-                <a:solidFill>
-                  <a:srgbClr val="0C2B1B"/>
-                </a:solidFill>
-                <a:latin typeface="Source Sans 3"/>
-              </a:rPr>
-              <a:t>Primary Stress Classifier: </a:t>
+              <a:rPr sz="1200" b="1">
+                <a:solidFill>
+                  <a:srgbClr val="0C2B1B"/>
+                </a:solidFill>
+                <a:latin typeface="Source Sans 3"/>
+              </a:rPr>
+              <a:t>Primary Classifier: </a:t>
             </a:r>
             <a:r>
               <a:rPr sz="1200">
@@ -10800,6 +11336,12 @@
               </a:rPr>
               <a:t>91.86% Accuracy | 96.38% Precision | 94.14% ROC-AUC</a:t>
             </a:r>
+            <a:endParaRPr sz="1200">
+              <a:solidFill>
+                <a:srgbClr val="1A2820"/>
+              </a:solidFill>
+              <a:latin typeface="Source Sans 3"/>
+            </a:endParaRPr>
           </a:p>
           <a:p>
             <a:pPr>
@@ -10808,7 +11350,7 @@
               </a:spcAft>
             </a:pPr>
             <a:r>
-              <a:rPr b="1" sz="1200">
+              <a:rPr sz="1200" b="1">
                 <a:solidFill>
                   <a:srgbClr val="0C2B1B"/>
                 </a:solidFill>
@@ -10823,8 +11365,14 @@
                 </a:solidFill>
                 <a:latin typeface="Source Sans 3"/>
               </a:rPr>
-              <a:t>Drought: 97.5% | Waterlog: 99.5% | Pest Bloom: 97.9% | Fungal Disease: 98.9%</a:t>
-            </a:r>
+              <a:t>Drought: 97.5% | Waterlog: 99.5% | Pests: 97.9% | Disease: 98.9%</a:t>
+            </a:r>
+            <a:endParaRPr sz="1200">
+              <a:solidFill>
+                <a:srgbClr val="1A2820"/>
+              </a:solidFill>
+              <a:latin typeface="Source Sans 3"/>
+            </a:endParaRPr>
           </a:p>
           <a:p>
             <a:pPr>
@@ -10833,13 +11381,13 @@
               </a:spcAft>
             </a:pPr>
             <a:r>
-              <a:rPr b="1" sz="1200">
-                <a:solidFill>
-                  <a:srgbClr val="0C2B1B"/>
-                </a:solidFill>
-                <a:latin typeface="Source Sans 3"/>
-              </a:rPr>
-              <a:t>Evaluation Dataset Note: </a:t>
+              <a:rPr sz="1200" b="1">
+                <a:solidFill>
+                  <a:srgbClr val="0C2B1B"/>
+                </a:solidFill>
+                <a:latin typeface="Source Sans 3"/>
+              </a:rPr>
+              <a:t>Validation Plan: </a:t>
             </a:r>
             <a:r>
               <a:rPr sz="1200">
@@ -10848,8 +11396,14 @@
                 </a:solidFill>
                 <a:latin typeface="Source Sans 3"/>
               </a:rPr>
-              <a:t>Trained on synthetic Goa agro-climatic data (3,500 samples); real-world field validation with ICAR/ZAO is our proposed next step.</a:t>
-            </a:r>
+              <a:t>Trained on 3,500 synthetic samples; field calibration with ICAR/ZAO planned next.</a:t>
+            </a:r>
+            <a:endParaRPr sz="1200">
+              <a:solidFill>
+                <a:srgbClr val="1A2820"/>
+              </a:solidFill>
+              <a:latin typeface="Source Sans 3"/>
+            </a:endParaRPr>
           </a:p>
         </p:txBody>
       </p:sp>
@@ -10862,7 +11416,7 @@
 </file>
 
 <file path=ppt/slides/slide8.xml><?xml version="1.0" encoding="utf-8"?>
-<p:sld xmlns:a="http://schemas.openxmlformats.org/drawingml/2006/main" xmlns:p="http://schemas.openxmlformats.org/presentationml/2006/main" xmlns:r="http://schemas.openxmlformats.org/officeDocument/2006/relationships">
+<p:sld xmlns:a="http://schemas.openxmlformats.org/drawingml/2006/main" xmlns:r="http://schemas.openxmlformats.org/officeDocument/2006/relationships" xmlns:p="http://schemas.openxmlformats.org/presentationml/2006/main">
   <p:cSld>
     <p:bg>
       <p:bgPr>
@@ -10946,7 +11500,7 @@
               </a:defRPr>
             </a:pPr>
             <a:r>
-              <a:t>Opening the black box: Decomposing exact meteorological drivers of crop stress</a:t>
+              <a:t>Decomposing environmental drivers of crop stress to build trust with agronomists</a:t>
             </a:r>
           </a:p>
         </p:txBody>
@@ -11040,13 +11594,13 @@
               </a:spcAft>
             </a:pPr>
             <a:r>
-              <a:rPr b="1" sz="1200">
-                <a:solidFill>
-                  <a:srgbClr val="0C2B1B"/>
-                </a:solidFill>
-                <a:latin typeface="Source Sans 3"/>
-              </a:rPr>
-              <a:t>Interactive Stress Injection: </a:t>
+              <a:rPr sz="1200" b="1">
+                <a:solidFill>
+                  <a:srgbClr val="0C2B1B"/>
+                </a:solidFill>
+                <a:latin typeface="Source Sans 3"/>
+              </a:rPr>
+              <a:t>Stress Simulation: </a:t>
             </a:r>
             <a:r>
               <a:rPr sz="1200">
@@ -11055,8 +11609,14 @@
                 </a:solidFill>
                 <a:latin typeface="Source Sans 3"/>
               </a:rPr>
-              <a:t>Allows agricultural officers to simulate weather disruptions and observe AI model responses in real time.</a:t>
-            </a:r>
+              <a:t>Officers inject simulated weather anomalies to inspect real-time AI responses.</a:t>
+            </a:r>
+            <a:endParaRPr sz="1200">
+              <a:solidFill>
+                <a:srgbClr val="1A2820"/>
+              </a:solidFill>
+              <a:latin typeface="Source Sans 3"/>
+            </a:endParaRPr>
           </a:p>
           <a:p>
             <a:pPr>
@@ -11065,13 +11625,13 @@
               </a:spcAft>
             </a:pPr>
             <a:r>
-              <a:rPr b="1" sz="1200">
-                <a:solidFill>
-                  <a:srgbClr val="0C2B1B"/>
-                </a:solidFill>
-                <a:latin typeface="Source Sans 3"/>
-              </a:rPr>
-              <a:t>Dedicated Confirm Controls: </a:t>
+              <a:rPr sz="1200" b="1">
+                <a:solidFill>
+                  <a:srgbClr val="0C2B1B"/>
+                </a:solidFill>
+                <a:latin typeface="Source Sans 3"/>
+              </a:rPr>
+              <a:t>Dedicated Triggers: </a:t>
             </a:r>
             <a:r>
               <a:rPr sz="1200">
@@ -11080,8 +11640,14 @@
                 </a:solidFill>
                 <a:latin typeface="Source Sans 3"/>
               </a:rPr>
-              <a:t>Features explicit confirmation triggers so users tweak sliders smoothly without mid-input reload lag.</a:t>
-            </a:r>
+              <a:t>Explicit confirmation triggers prevent mid-input reload lag.</a:t>
+            </a:r>
+            <a:endParaRPr sz="1200">
+              <a:solidFill>
+                <a:srgbClr val="1A2820"/>
+              </a:solidFill>
+              <a:latin typeface="Source Sans 3"/>
+            </a:endParaRPr>
           </a:p>
           <a:p>
             <a:pPr>
@@ -11090,13 +11656,13 @@
               </a:spcAft>
             </a:pPr>
             <a:r>
-              <a:rPr b="1" sz="1200">
-                <a:solidFill>
-                  <a:srgbClr val="0C2B1B"/>
-                </a:solidFill>
-                <a:latin typeface="Source Sans 3"/>
-              </a:rPr>
-              <a:t>Simulated Weather Factors: </a:t>
+              <a:rPr sz="1200" b="1">
+                <a:solidFill>
+                  <a:srgbClr val="0C2B1B"/>
+                </a:solidFill>
+                <a:latin typeface="Source Sans 3"/>
+              </a:rPr>
+              <a:t>Weather Factors: </a:t>
             </a:r>
             <a:r>
               <a:rPr sz="1200">
@@ -11105,8 +11671,14 @@
                 </a:solidFill>
                 <a:latin typeface="Source Sans 3"/>
               </a:rPr>
-              <a:t>24h Rainfall (0–350mm) • Air Temperature (18–44°C) • Relative Humidity (25–100%)</a:t>
-            </a:r>
+              <a:t>24h Rain (0–350mm), Temperature (18–44°C), Relative Humidity (25–100%).</a:t>
+            </a:r>
+            <a:endParaRPr sz="1200">
+              <a:solidFill>
+                <a:srgbClr val="1A2820"/>
+              </a:solidFill>
+              <a:latin typeface="Source Sans 3"/>
+            </a:endParaRPr>
           </a:p>
           <a:p>
             <a:pPr>
@@ -11115,13 +11687,13 @@
               </a:spcAft>
             </a:pPr>
             <a:r>
-              <a:rPr b="1" sz="1200">
-                <a:solidFill>
-                  <a:srgbClr val="0C2B1B"/>
-                </a:solidFill>
-                <a:latin typeface="Source Sans 3"/>
-              </a:rPr>
-              <a:t>Simulated Soil &amp; Biological: </a:t>
+              <a:rPr sz="1200" b="1">
+                <a:solidFill>
+                  <a:srgbClr val="0C2B1B"/>
+                </a:solidFill>
+                <a:latin typeface="Source Sans 3"/>
+              </a:rPr>
+              <a:t>Soil &amp; Biology: </a:t>
             </a:r>
             <a:r>
               <a:rPr sz="1200">
@@ -11130,8 +11702,14 @@
                 </a:solidFill>
                 <a:latin typeface="Source Sans 3"/>
               </a:rPr>
-              <a:t>Consecutive Dry/Wet Days • Soil Moisture (10–100%) • Soil pH (4.0–8.0) • Pest/Disease Pressure</a:t>
-            </a:r>
+              <a:t>Dry/Wet streaks, Soil Moisture (10–100%), pH (4.0–8.0), Pest pressure.</a:t>
+            </a:r>
+            <a:endParaRPr sz="1200">
+              <a:solidFill>
+                <a:srgbClr val="1A2820"/>
+              </a:solidFill>
+              <a:latin typeface="Source Sans 3"/>
+            </a:endParaRPr>
           </a:p>
         </p:txBody>
       </p:sp>
@@ -11224,13 +11802,13 @@
               </a:spcAft>
             </a:pPr>
             <a:r>
-              <a:rPr b="1" sz="1200">
-                <a:solidFill>
-                  <a:srgbClr val="0C2B1B"/>
-                </a:solidFill>
-                <a:latin typeface="Source Sans 3"/>
-              </a:rPr>
-              <a:t>Feature Importance Attribution: </a:t>
+              <a:rPr sz="1200" b="1">
+                <a:solidFill>
+                  <a:srgbClr val="0C2B1B"/>
+                </a:solidFill>
+                <a:latin typeface="Source Sans 3"/>
+              </a:rPr>
+              <a:t>Feature Attribution: </a:t>
             </a:r>
             <a:r>
               <a:rPr sz="1200">
@@ -11239,8 +11817,14 @@
                 </a:solidFill>
                 <a:latin typeface="Source Sans 3"/>
               </a:rPr>
-              <a:t>Decomposes Gini decision weights so the model explicitly justifies why an alert was triggered.</a:t>
-            </a:r>
+              <a:t>Gini impurity weights reveal the primary drivers behind each alert.</a:t>
+            </a:r>
+            <a:endParaRPr sz="1200">
+              <a:solidFill>
+                <a:srgbClr val="1A2820"/>
+              </a:solidFill>
+              <a:latin typeface="Source Sans 3"/>
+            </a:endParaRPr>
           </a:p>
           <a:p>
             <a:pPr>
@@ -11249,13 +11833,13 @@
               </a:spcAft>
             </a:pPr>
             <a:r>
-              <a:rPr b="1" sz="1200">
-                <a:solidFill>
-                  <a:srgbClr val="0C2B1B"/>
-                </a:solidFill>
-                <a:latin typeface="Source Sans 3"/>
-              </a:rPr>
-              <a:t>No Black Box Guarantee: </a:t>
+              <a:rPr sz="1200" b="1">
+                <a:solidFill>
+                  <a:srgbClr val="0C2B1B"/>
+                </a:solidFill>
+                <a:latin typeface="Source Sans 3"/>
+              </a:rPr>
+              <a:t>Transparent Reasoning: </a:t>
             </a:r>
             <a:r>
               <a:rPr sz="1200">
@@ -11264,8 +11848,14 @@
                 </a:solidFill>
                 <a:latin typeface="Source Sans 3"/>
               </a:rPr>
-              <a:t>Officers can see which telemetry signals were most influential (e.g. Consecutive Dry Days: 0.216, Soil Moisture: 0.184).</a:t>
-            </a:r>
+              <a:t>Shows influence scores (e.g. Consecutive Dry Days: 0.216, Soil Moisture: 0.184).</a:t>
+            </a:r>
+            <a:endParaRPr sz="1200">
+              <a:solidFill>
+                <a:srgbClr val="1A2820"/>
+              </a:solidFill>
+              <a:latin typeface="Source Sans 3"/>
+            </a:endParaRPr>
           </a:p>
           <a:p>
             <a:pPr>
@@ -11274,13 +11864,13 @@
               </a:spcAft>
             </a:pPr>
             <a:r>
-              <a:rPr b="1" sz="1200">
-                <a:solidFill>
-                  <a:srgbClr val="0C2B1B"/>
-                </a:solidFill>
-                <a:latin typeface="Source Sans 3"/>
-              </a:rPr>
-              <a:t>6-Axis Spider / Radar Decomposition: </a:t>
+              <a:rPr sz="1200" b="1">
+                <a:solidFill>
+                  <a:srgbClr val="0C2B1B"/>
+                </a:solidFill>
+                <a:latin typeface="Source Sans 3"/>
+              </a:rPr>
+              <a:t>6-Axis Radar Plots: </a:t>
             </a:r>
             <a:r>
               <a:rPr sz="1200">
@@ -11289,8 +11879,14 @@
                 </a:solidFill>
                 <a:latin typeface="Source Sans 3"/>
               </a:rPr>
-              <a:t>Plots multi-hazard stress probabilities across Drought, Waterlog, Pest, Disease, Heat, and Soil Acidity simultaneously.</a:t>
-            </a:r>
+              <a:t>Simultaneously plots drought, flooding, pests, disease, heat, and acidity.</a:t>
+            </a:r>
+            <a:endParaRPr sz="1200">
+              <a:solidFill>
+                <a:srgbClr val="1A2820"/>
+              </a:solidFill>
+              <a:latin typeface="Source Sans 3"/>
+            </a:endParaRPr>
           </a:p>
           <a:p>
             <a:pPr>
@@ -11299,13 +11895,13 @@
               </a:spcAft>
             </a:pPr>
             <a:r>
-              <a:rPr b="1" sz="1200">
-                <a:solidFill>
-                  <a:srgbClr val="0C2B1B"/>
-                </a:solidFill>
-                <a:latin typeface="Source Sans 3"/>
-              </a:rPr>
-              <a:t>ICAR-CCARI Prescriptions: </a:t>
+              <a:rPr sz="1200" b="1">
+                <a:solidFill>
+                  <a:srgbClr val="0C2B1B"/>
+                </a:solidFill>
+                <a:latin typeface="Source Sans 3"/>
+              </a:rPr>
+              <a:t>Remediation Links: </a:t>
             </a:r>
             <a:r>
               <a:rPr sz="1200">
@@ -11314,8 +11910,14 @@
                 </a:solidFill>
                 <a:latin typeface="Source Sans 3"/>
               </a:rPr>
-              <a:t>Automatically maps predicted hazards to scientific remediation protocols in English and Konkani.</a:t>
-            </a:r>
+              <a:t>Directly maps hazards to scientific ICAR-CCARI protocols in Konkani &amp; English.</a:t>
+            </a:r>
+            <a:endParaRPr sz="1200">
+              <a:solidFill>
+                <a:srgbClr val="1A2820"/>
+              </a:solidFill>
+              <a:latin typeface="Source Sans 3"/>
+            </a:endParaRPr>
           </a:p>
         </p:txBody>
       </p:sp>
@@ -11391,7 +11993,7 @@
               <a:t>🔍  </a:t>
             </a:r>
             <a:r>
-              <a:rPr b="1" sz="1250">
+              <a:rPr sz="1250" b="1">
                 <a:solidFill>
                   <a:srgbClr val="0C2B1B"/>
                 </a:solidFill>
@@ -11406,8 +12008,14 @@
                 </a:solidFill>
                 <a:latin typeface="Source Sans 3"/>
               </a:rPr>
-              <a:t>Explainable AI builds trust with agricultural officers and farmers by proving which environmental telemetry signals drove the model's prediction before any advisory is dispatched.</a:t>
-            </a:r>
+              <a:t>XAI eliminates the 'black box' by proving which environmental factors drove each alert before dispatch.</a:t>
+            </a:r>
+            <a:endParaRPr sz="1250">
+              <a:solidFill>
+                <a:srgbClr val="1A2820"/>
+              </a:solidFill>
+              <a:latin typeface="Source Sans 3"/>
+            </a:endParaRPr>
           </a:p>
         </p:txBody>
       </p:sp>
@@ -11420,7 +12028,7 @@
 </file>
 
 <file path=ppt/slides/slide9.xml><?xml version="1.0" encoding="utf-8"?>
-<p:sld xmlns:a="http://schemas.openxmlformats.org/drawingml/2006/main" xmlns:p="http://schemas.openxmlformats.org/presentationml/2006/main" xmlns:r="http://schemas.openxmlformats.org/officeDocument/2006/relationships">
+<p:sld xmlns:a="http://schemas.openxmlformats.org/drawingml/2006/main" xmlns:r="http://schemas.openxmlformats.org/officeDocument/2006/relationships" xmlns:p="http://schemas.openxmlformats.org/presentationml/2006/main">
   <p:cSld>
     <p:bg>
       <p:bgPr>
@@ -11504,7 +12112,7 @@
               </a:defRPr>
             </a:pPr>
             <a:r>
-              <a:t>Combining computer-vision lesion detection with live Goan microclimatic telemetry</a:t>
+              <a:t>Fusing computer-vision lesion detection with live microclimatic conditions</a:t>
             </a:r>
           </a:p>
         </p:txBody>
@@ -11518,7 +12126,7 @@
           <p:nvPr/>
         </p:nvPicPr>
         <p:blipFill>
-          <a:blip r:embed="rId2"/>
+          <a:blip r:embed="rId1"/>
           <a:stretch>
             <a:fillRect/>
           </a:stretch>
@@ -11595,7 +12203,7 @@
           <a:noFill/>
         </p:spPr>
         <p:txBody>
-          <a:bodyPr wrap="square" lIns="27432" rIns="27432" tIns="27432" bIns="27432">
+          <a:bodyPr wrap="square" lIns="27432" tIns="27432" rIns="27432" bIns="27432">
             <a:spAutoFit/>
           </a:bodyPr>
           <a:lstStyle/>
@@ -11610,6 +12218,12 @@
               </a:rPr>
               <a:t>1. Leaf Image</a:t>
             </a:r>
+            <a:endParaRPr sz="1050" b="1">
+              <a:solidFill>
+                <a:srgbClr val="0C2B1B"/>
+              </a:solidFill>
+              <a:latin typeface="Montserrat"/>
+            </a:endParaRPr>
           </a:p>
           <a:p>
             <a:pPr algn="ctr">
@@ -11626,6 +12240,12 @@
               </a:rPr>
               <a:t>Field sample upload</a:t>
             </a:r>
+            <a:endParaRPr sz="850">
+              <a:solidFill>
+                <a:srgbClr val="4A6B56"/>
+              </a:solidFill>
+              <a:latin typeface="Source Sans 3"/>
+            </a:endParaRPr>
           </a:p>
         </p:txBody>
       </p:sp>
@@ -11691,7 +12311,7 @@
           <a:noFill/>
         </p:spPr>
         <p:txBody>
-          <a:bodyPr wrap="square" lIns="27432" rIns="27432" tIns="27432" bIns="27432">
+          <a:bodyPr wrap="square" lIns="27432" tIns="27432" rIns="27432" bIns="27432">
             <a:spAutoFit/>
           </a:bodyPr>
           <a:lstStyle/>
@@ -11706,6 +12326,12 @@
               </a:rPr>
               <a:t>2. Computer Vision</a:t>
             </a:r>
+            <a:endParaRPr sz="1050" b="1">
+              <a:solidFill>
+                <a:srgbClr val="0C2B1B"/>
+              </a:solidFill>
+              <a:latin typeface="Montserrat"/>
+            </a:endParaRPr>
           </a:p>
           <a:p>
             <a:pPr algn="ctr">
@@ -11722,6 +12348,12 @@
               </a:rPr>
               <a:t>HSV color analysis</a:t>
             </a:r>
+            <a:endParaRPr sz="850">
+              <a:solidFill>
+                <a:srgbClr val="4A6B56"/>
+              </a:solidFill>
+              <a:latin typeface="Source Sans 3"/>
+            </a:endParaRPr>
           </a:p>
         </p:txBody>
       </p:sp>
@@ -11787,7 +12419,7 @@
           <a:noFill/>
         </p:spPr>
         <p:txBody>
-          <a:bodyPr wrap="square" lIns="27432" rIns="27432" tIns="27432" bIns="27432">
+          <a:bodyPr wrap="square" lIns="27432" tIns="27432" rIns="27432" bIns="27432">
             <a:spAutoFit/>
           </a:bodyPr>
           <a:lstStyle/>
@@ -11802,6 +12434,12 @@
               </a:rPr>
               <a:t>3. Color &amp; Lesions</a:t>
             </a:r>
+            <a:endParaRPr sz="1050" b="1">
+              <a:solidFill>
+                <a:srgbClr val="0C2B1B"/>
+              </a:solidFill>
+              <a:latin typeface="Montserrat"/>
+            </a:endParaRPr>
           </a:p>
           <a:p>
             <a:pPr algn="ctr">
@@ -11818,6 +12456,12 @@
               </a:rPr>
               <a:t>Necrosis area masking</a:t>
             </a:r>
+            <a:endParaRPr sz="850">
+              <a:solidFill>
+                <a:srgbClr val="4A6B56"/>
+              </a:solidFill>
+              <a:latin typeface="Source Sans 3"/>
+            </a:endParaRPr>
           </a:p>
         </p:txBody>
       </p:sp>
@@ -11883,7 +12527,7 @@
           <a:noFill/>
         </p:spPr>
         <p:txBody>
-          <a:bodyPr wrap="square" lIns="27432" rIns="27432" tIns="27432" bIns="27432">
+          <a:bodyPr wrap="square" lIns="27432" tIns="27432" rIns="27432" bIns="27432">
             <a:spAutoFit/>
           </a:bodyPr>
           <a:lstStyle/>
@@ -11898,6 +12542,12 @@
               </a:rPr>
               <a:t>4. Environmental Data</a:t>
             </a:r>
+            <a:endParaRPr sz="1050" b="1">
+              <a:solidFill>
+                <a:srgbClr val="0C2B1B"/>
+              </a:solidFill>
+              <a:latin typeface="Montserrat"/>
+            </a:endParaRPr>
           </a:p>
           <a:p>
             <a:pPr algn="ctr">
@@ -11914,6 +12564,12 @@
               </a:rPr>
               <a:t>Microclimate fusion</a:t>
             </a:r>
+            <a:endParaRPr sz="850">
+              <a:solidFill>
+                <a:srgbClr val="4A6B56"/>
+              </a:solidFill>
+              <a:latin typeface="Source Sans 3"/>
+            </a:endParaRPr>
           </a:p>
         </p:txBody>
       </p:sp>
@@ -11979,7 +12635,7 @@
           <a:noFill/>
         </p:spPr>
         <p:txBody>
-          <a:bodyPr wrap="square" lIns="27432" rIns="27432" tIns="27432" bIns="27432">
+          <a:bodyPr wrap="square" lIns="27432" tIns="27432" rIns="27432" bIns="27432">
             <a:spAutoFit/>
           </a:bodyPr>
           <a:lstStyle/>
@@ -11994,6 +12650,12 @@
               </a:rPr>
               <a:t>5. Risk Assessment</a:t>
             </a:r>
+            <a:endParaRPr sz="1050" b="1">
+              <a:solidFill>
+                <a:srgbClr val="0C2B1B"/>
+              </a:solidFill>
+              <a:latin typeface="Montserrat"/>
+            </a:endParaRPr>
           </a:p>
           <a:p>
             <a:pPr algn="ctr">
@@ -12010,6 +12672,12 @@
               </a:rPr>
               <a:t>Composite AI diagnosis</a:t>
             </a:r>
+            <a:endParaRPr sz="850">
+              <a:solidFill>
+                <a:srgbClr val="4A6B56"/>
+              </a:solidFill>
+              <a:latin typeface="Source Sans 3"/>
+            </a:endParaRPr>
           </a:p>
         </p:txBody>
       </p:sp>
@@ -12102,13 +12770,13 @@
               </a:spcAft>
             </a:pPr>
             <a:r>
-              <a:rPr b="1" sz="1200">
-                <a:solidFill>
-                  <a:srgbClr val="0C2B1B"/>
-                </a:solidFill>
-                <a:latin typeface="Source Sans 3"/>
-              </a:rPr>
-              <a:t>Specimen Ingestion: </a:t>
+              <a:rPr sz="1200" b="1">
+                <a:solidFill>
+                  <a:srgbClr val="0C2B1B"/>
+                </a:solidFill>
+                <a:latin typeface="Source Sans 3"/>
+              </a:rPr>
+              <a:t>Mobile Ingestion: </a:t>
             </a:r>
             <a:r>
               <a:rPr sz="1200">
@@ -12117,8 +12785,14 @@
                 </a:solidFill>
                 <a:latin typeface="Source Sans 3"/>
               </a:rPr>
-              <a:t>Direct mobile upload with colorimetric RGB-to-HSV conversion.</a:t>
-            </a:r>
+              <a:t>Direct field sample upload with RGB-to-HSV colorimetric segmentation.</a:t>
+            </a:r>
+            <a:endParaRPr sz="1200">
+              <a:solidFill>
+                <a:srgbClr val="1A2820"/>
+              </a:solidFill>
+              <a:latin typeface="Source Sans 3"/>
+            </a:endParaRPr>
           </a:p>
           <a:p>
             <a:pPr>
@@ -12127,13 +12801,13 @@
               </a:spcAft>
             </a:pPr>
             <a:r>
-              <a:rPr b="1" sz="1200">
-                <a:solidFill>
-                  <a:srgbClr val="0C2B1B"/>
-                </a:solidFill>
-                <a:latin typeface="Source Sans 3"/>
-              </a:rPr>
-              <a:t>Lesion Segmentation: </a:t>
+              <a:rPr sz="1200" b="1">
+                <a:solidFill>
+                  <a:srgbClr val="0C2B1B"/>
+                </a:solidFill>
+                <a:latin typeface="Source Sans 3"/>
+              </a:rPr>
+              <a:t>Lesion Masking: </a:t>
             </a:r>
             <a:r>
               <a:rPr sz="1200">
@@ -12142,8 +12816,14 @@
                 </a:solidFill>
                 <a:latin typeface="Source Sans 3"/>
               </a:rPr>
-              <a:t>Calculates foliar necrotic ratio &amp; brown-spot clustering using NumPy &amp; PIL.</a:t>
-            </a:r>
+              <a:t>Calculates necrotic leaf ratios and spot clustering via NumPy &amp; PIL.</a:t>
+            </a:r>
+            <a:endParaRPr sz="1200">
+              <a:solidFill>
+                <a:srgbClr val="1A2820"/>
+              </a:solidFill>
+              <a:latin typeface="Source Sans 3"/>
+            </a:endParaRPr>
           </a:p>
           <a:p>
             <a:pPr>
@@ -12152,7 +12832,7 @@
               </a:spcAft>
             </a:pPr>
             <a:r>
-              <a:rPr b="1" sz="1200">
+              <a:rPr sz="1200" b="1">
                 <a:solidFill>
                   <a:srgbClr val="0C2B1B"/>
                 </a:solidFill>
@@ -12167,8 +12847,14 @@
                 </a:solidFill>
                 <a:latin typeface="Source Sans 3"/>
               </a:rPr>
-              <a:t>Calibrated for Rice Blast (भाताचेर करपा), Cashew Shoot Blight &amp; Coconut Bud Rot.</a:t>
-            </a:r>
+              <a:t>Calibrated for Rice Blast (भाताचेर करपा), Cashew Blight &amp; Coconut Bud Rot.</a:t>
+            </a:r>
+            <a:endParaRPr sz="1200">
+              <a:solidFill>
+                <a:srgbClr val="1A2820"/>
+              </a:solidFill>
+              <a:latin typeface="Source Sans 3"/>
+            </a:endParaRPr>
           </a:p>
         </p:txBody>
       </p:sp>
@@ -12261,7 +12947,7 @@
               </a:spcAft>
             </a:pPr>
             <a:r>
-              <a:rPr b="1" sz="1200">
+              <a:rPr sz="1200" b="1">
                 <a:solidFill>
                   <a:srgbClr val="0C2B1B"/>
                 </a:solidFill>
@@ -12276,8 +12962,14 @@
                 </a:solidFill>
                 <a:latin typeface="Source Sans 3"/>
               </a:rPr>
-              <a:t>Visual symptoms alone cannot distinguish harmless mud from fungal infection.</a:t>
-            </a:r>
+              <a:t>Visual symptoms alone cannot distinguish benign dirt from active fungal infection.</a:t>
+            </a:r>
+            <a:endParaRPr sz="1200">
+              <a:solidFill>
+                <a:srgbClr val="1A2820"/>
+              </a:solidFill>
+              <a:latin typeface="Source Sans 3"/>
+            </a:endParaRPr>
           </a:p>
           <a:p>
             <a:pPr>
@@ -12286,13 +12978,13 @@
               </a:spcAft>
             </a:pPr>
             <a:r>
-              <a:rPr b="1" sz="1200">
-                <a:solidFill>
-                  <a:srgbClr val="0C2B1B"/>
-                </a:solidFill>
-                <a:latin typeface="Source Sans 3"/>
-              </a:rPr>
-              <a:t>Microclimatic Heuristic: </a:t>
+              <a:rPr sz="1200" b="1">
+                <a:solidFill>
+                  <a:srgbClr val="0C2B1B"/>
+                </a:solidFill>
+                <a:latin typeface="Source Sans 3"/>
+              </a:rPr>
+              <a:t>Microclimate Check: </a:t>
             </a:r>
             <a:r>
               <a:rPr sz="1200">
@@ -12301,8 +12993,14 @@
                 </a:solidFill>
                 <a:latin typeface="Source Sans 3"/>
               </a:rPr>
-              <a:t>Cross-checks active spore proliferation (Humidity &gt;85% + Temp 24–32°C).</a:t>
-            </a:r>
+              <a:t>Cross-validates active spore proliferation (Humidity &gt;85% + Temp 24–32°C).</a:t>
+            </a:r>
+            <a:endParaRPr sz="1200">
+              <a:solidFill>
+                <a:srgbClr val="1A2820"/>
+              </a:solidFill>
+              <a:latin typeface="Source Sans 3"/>
+            </a:endParaRPr>
           </a:p>
           <a:p>
             <a:pPr>
@@ -12311,13 +13009,13 @@
               </a:spcAft>
             </a:pPr>
             <a:r>
-              <a:rPr b="1" sz="1200">
-                <a:solidFill>
-                  <a:srgbClr val="0C2B1B"/>
-                </a:solidFill>
-                <a:latin typeface="Source Sans 3"/>
-              </a:rPr>
-              <a:t>Composite Action Plan: </a:t>
+              <a:rPr sz="1200" b="1">
+                <a:solidFill>
+                  <a:srgbClr val="0C2B1B"/>
+                </a:solidFill>
+                <a:latin typeface="Source Sans 3"/>
+              </a:rPr>
+              <a:t>Targeted Guidance: </a:t>
             </a:r>
             <a:r>
               <a:rPr sz="1200">
@@ -12326,8 +13024,14 @@
                 </a:solidFill>
                 <a:latin typeface="Source Sans 3"/>
               </a:rPr>
-              <a:t>Combines visual indicators with taluka climate to produce trusted ICAR-CCARI treatment advice.</a:t>
-            </a:r>
+              <a:t>Delivers high-confidence ICAR remediation protocols tailored to the taluka.</a:t>
+            </a:r>
+            <a:endParaRPr sz="1200">
+              <a:solidFill>
+                <a:srgbClr val="1A2820"/>
+              </a:solidFill>
+              <a:latin typeface="Source Sans 3"/>
+            </a:endParaRPr>
           </a:p>
         </p:txBody>
       </p:sp>
@@ -12655,6 +13359,10 @@
       </a:style>
     </a:lnDef>
   </a:objectDefaults>
-  <a:extraClrSchemeLst/>
+  <a:extLst>
+    <a:ext uri="{05A4C25C-085E-4340-85A3-A5531E510DB2}">
+      <thm15:themeFamily xmlns:thm15="http://schemas.microsoft.com/office/thememl/2012/main" name="Office Theme" id="{62F939B6-93AF-4DB8-9C6B-D6C7DFDC589F}" vid="{4A3C46E8-61CC-4603-A589-7422A47A8E4A}"/>
+    </a:ext>
+  </a:extLst>
 </a:theme>
 </file>